--- a/SyncBoard 使用說明文件.pptx
+++ b/SyncBoard 使用說明文件.pptx
@@ -6,10 +6,10 @@
   </p:sldMasterIdLst>
   <p:sldIdLst>
     <p:sldId id="256" r:id="rId2"/>
-    <p:sldId id="257" r:id="rId3"/>
-    <p:sldId id="258" r:id="rId4"/>
-    <p:sldId id="259" r:id="rId5"/>
-    <p:sldId id="260" r:id="rId6"/>
+    <p:sldId id="269" r:id="rId3"/>
+    <p:sldId id="257" r:id="rId4"/>
+    <p:sldId id="258" r:id="rId5"/>
+    <p:sldId id="259" r:id="rId6"/>
     <p:sldId id="261" r:id="rId7"/>
     <p:sldId id="263" r:id="rId8"/>
     <p:sldId id="262" r:id="rId9"/>
@@ -18,6 +18,21 @@
     <p:sldId id="266" r:id="rId12"/>
     <p:sldId id="267" r:id="rId13"/>
     <p:sldId id="268" r:id="rId14"/>
+    <p:sldId id="270" r:id="rId15"/>
+    <p:sldId id="271" r:id="rId16"/>
+    <p:sldId id="273" r:id="rId17"/>
+    <p:sldId id="280" r:id="rId18"/>
+    <p:sldId id="274" r:id="rId19"/>
+    <p:sldId id="272" r:id="rId20"/>
+    <p:sldId id="275" r:id="rId21"/>
+    <p:sldId id="277" r:id="rId22"/>
+    <p:sldId id="281" r:id="rId23"/>
+    <p:sldId id="278" r:id="rId24"/>
+    <p:sldId id="276" r:id="rId25"/>
+    <p:sldId id="279" r:id="rId26"/>
+    <p:sldId id="282" r:id="rId27"/>
+    <p:sldId id="285" r:id="rId28"/>
+    <p:sldId id="284" r:id="rId29"/>
   </p:sldIdLst>
   <p:sldSz cx="12192000" cy="6858000"/>
   <p:notesSz cx="6858000" cy="9144000"/>
@@ -116,6 +131,11 @@
       </a:defRPr>
     </a:lvl9pPr>
   </p:defaultTextStyle>
+  <p:extLst>
+    <p:ext uri="{EFAFB233-063F-42B5-8137-9DF3F51BA10A}">
+      <p15:sldGuideLst xmlns:p15="http://schemas.microsoft.com/office/powerpoint/2012/main"/>
+    </p:ext>
+  </p:extLst>
 </p:presentation>
 </file>
 
@@ -266,7 +286,7 @@
           <a:p>
             <a:fld id="{5DCDB231-F13C-44D7-87DA-8AED873F6DD1}" type="datetimeFigureOut">
               <a:rPr lang="zh-TW" altLang="en-US" smtClean="0"/>
-              <a:t>2026/8/12</a:t>
+              <a:t>2026/8/17</a:t>
             </a:fld>
             <a:endParaRPr lang="zh-TW" altLang="en-US"/>
           </a:p>
@@ -464,7 +484,7 @@
           <a:p>
             <a:fld id="{5DCDB231-F13C-44D7-87DA-8AED873F6DD1}" type="datetimeFigureOut">
               <a:rPr lang="zh-TW" altLang="en-US" smtClean="0"/>
-              <a:t>2026/8/12</a:t>
+              <a:t>2026/8/17</a:t>
             </a:fld>
             <a:endParaRPr lang="zh-TW" altLang="en-US"/>
           </a:p>
@@ -672,7 +692,7 @@
           <a:p>
             <a:fld id="{5DCDB231-F13C-44D7-87DA-8AED873F6DD1}" type="datetimeFigureOut">
               <a:rPr lang="zh-TW" altLang="en-US" smtClean="0"/>
-              <a:t>2026/8/12</a:t>
+              <a:t>2026/8/17</a:t>
             </a:fld>
             <a:endParaRPr lang="zh-TW" altLang="en-US"/>
           </a:p>
@@ -870,7 +890,7 @@
           <a:p>
             <a:fld id="{5DCDB231-F13C-44D7-87DA-8AED873F6DD1}" type="datetimeFigureOut">
               <a:rPr lang="zh-TW" altLang="en-US" smtClean="0"/>
-              <a:t>2026/8/12</a:t>
+              <a:t>2026/8/17</a:t>
             </a:fld>
             <a:endParaRPr lang="zh-TW" altLang="en-US"/>
           </a:p>
@@ -1145,7 +1165,7 @@
           <a:p>
             <a:fld id="{5DCDB231-F13C-44D7-87DA-8AED873F6DD1}" type="datetimeFigureOut">
               <a:rPr lang="zh-TW" altLang="en-US" smtClean="0"/>
-              <a:t>2026/8/12</a:t>
+              <a:t>2026/8/17</a:t>
             </a:fld>
             <a:endParaRPr lang="zh-TW" altLang="en-US"/>
           </a:p>
@@ -1410,7 +1430,7 @@
           <a:p>
             <a:fld id="{5DCDB231-F13C-44D7-87DA-8AED873F6DD1}" type="datetimeFigureOut">
               <a:rPr lang="zh-TW" altLang="en-US" smtClean="0"/>
-              <a:t>2026/8/12</a:t>
+              <a:t>2026/8/17</a:t>
             </a:fld>
             <a:endParaRPr lang="zh-TW" altLang="en-US"/>
           </a:p>
@@ -1822,7 +1842,7 @@
           <a:p>
             <a:fld id="{5DCDB231-F13C-44D7-87DA-8AED873F6DD1}" type="datetimeFigureOut">
               <a:rPr lang="zh-TW" altLang="en-US" smtClean="0"/>
-              <a:t>2026/8/12</a:t>
+              <a:t>2026/8/17</a:t>
             </a:fld>
             <a:endParaRPr lang="zh-TW" altLang="en-US"/>
           </a:p>
@@ -1963,7 +1983,7 @@
           <a:p>
             <a:fld id="{5DCDB231-F13C-44D7-87DA-8AED873F6DD1}" type="datetimeFigureOut">
               <a:rPr lang="zh-TW" altLang="en-US" smtClean="0"/>
-              <a:t>2026/8/12</a:t>
+              <a:t>2026/8/17</a:t>
             </a:fld>
             <a:endParaRPr lang="zh-TW" altLang="en-US"/>
           </a:p>
@@ -2076,7 +2096,7 @@
           <a:p>
             <a:fld id="{5DCDB231-F13C-44D7-87DA-8AED873F6DD1}" type="datetimeFigureOut">
               <a:rPr lang="zh-TW" altLang="en-US" smtClean="0"/>
-              <a:t>2026/8/12</a:t>
+              <a:t>2026/8/17</a:t>
             </a:fld>
             <a:endParaRPr lang="zh-TW" altLang="en-US"/>
           </a:p>
@@ -2387,7 +2407,7 @@
           <a:p>
             <a:fld id="{5DCDB231-F13C-44D7-87DA-8AED873F6DD1}" type="datetimeFigureOut">
               <a:rPr lang="zh-TW" altLang="en-US" smtClean="0"/>
-              <a:t>2026/8/12</a:t>
+              <a:t>2026/8/17</a:t>
             </a:fld>
             <a:endParaRPr lang="zh-TW" altLang="en-US"/>
           </a:p>
@@ -2675,7 +2695,7 @@
           <a:p>
             <a:fld id="{5DCDB231-F13C-44D7-87DA-8AED873F6DD1}" type="datetimeFigureOut">
               <a:rPr lang="zh-TW" altLang="en-US" smtClean="0"/>
-              <a:t>2026/8/12</a:t>
+              <a:t>2026/8/17</a:t>
             </a:fld>
             <a:endParaRPr lang="zh-TW" altLang="en-US"/>
           </a:p>
@@ -2916,7 +2936,7 @@
           <a:p>
             <a:fld id="{5DCDB231-F13C-44D7-87DA-8AED873F6DD1}" type="datetimeFigureOut">
               <a:rPr lang="zh-TW" altLang="en-US" smtClean="0"/>
-              <a:t>2026/8/12</a:t>
+              <a:t>2026/8/17</a:t>
             </a:fld>
             <a:endParaRPr lang="zh-TW" altLang="en-US"/>
           </a:p>
@@ -3435,36 +3455,6 @@
           <a:chExt cx="0" cy="0"/>
         </a:xfrm>
       </p:grpSpPr>
-      <p:pic>
-        <p:nvPicPr>
-          <p:cNvPr id="5" name="圖片 4">
-            <a:extLst>
-              <a:ext uri="{FF2B5EF4-FFF2-40B4-BE49-F238E27FC236}">
-                <a16:creationId xmlns:a16="http://schemas.microsoft.com/office/drawing/2014/main" id="{5AB952F4-5FD0-4B52-9FF2-81C4475F1F80}"/>
-              </a:ext>
-            </a:extLst>
-          </p:cNvPr>
-          <p:cNvPicPr>
-            <a:picLocks noChangeAspect="1"/>
-          </p:cNvPicPr>
-          <p:nvPr/>
-        </p:nvPicPr>
-        <p:blipFill>
-          <a:blip r:embed="rId2"/>
-          <a:stretch>
-            <a:fillRect/>
-          </a:stretch>
-        </p:blipFill>
-        <p:spPr>
-          <a:xfrm>
-            <a:off x="921392" y="1799828"/>
-            <a:ext cx="10349215" cy="3984283"/>
-          </a:xfrm>
-          <a:prstGeom prst="rect">
-            <a:avLst/>
-          </a:prstGeom>
-        </p:spPr>
-      </p:pic>
       <p:sp>
         <p:nvSpPr>
           <p:cNvPr id="6" name="標題 1">
@@ -3514,12 +3504,53 @@
           <a:p>
             <a:r>
               <a:rPr lang="zh-TW" altLang="en-US" sz="3200" dirty="0"/>
-              <a:t>進入專案後，點選團隊成員的報告</a:t>
-            </a:r>
-            <a:endParaRPr lang="en-US" altLang="zh-TW" sz="3200" dirty="0"/>
-          </a:p>
-        </p:txBody>
-      </p:sp>
+              <a:t>進入專案後，點選團隊成員的</a:t>
+            </a:r>
+            <a:r>
+              <a:rPr lang="en-US" altLang="zh-TW" sz="3200" dirty="0"/>
+              <a:t>[</a:t>
+            </a:r>
+            <a:r>
+              <a:rPr lang="zh-TW" altLang="en-US" sz="3200" dirty="0"/>
+              <a:t>簡報放映</a:t>
+            </a:r>
+            <a:r>
+              <a:rPr lang="en-US" altLang="zh-TW" sz="3200" dirty="0"/>
+              <a:t>]</a:t>
+            </a:r>
+          </a:p>
+        </p:txBody>
+      </p:sp>
+      <p:pic>
+        <p:nvPicPr>
+          <p:cNvPr id="2" name="圖片 1">
+            <a:extLst>
+              <a:ext uri="{FF2B5EF4-FFF2-40B4-BE49-F238E27FC236}">
+                <a16:creationId xmlns:a16="http://schemas.microsoft.com/office/drawing/2014/main" id="{1DFE297E-7B1A-46EC-AF07-49129745C57E}"/>
+              </a:ext>
+            </a:extLst>
+          </p:cNvPr>
+          <p:cNvPicPr>
+            <a:picLocks noChangeAspect="1"/>
+          </p:cNvPicPr>
+          <p:nvPr/>
+        </p:nvPicPr>
+        <p:blipFill>
+          <a:blip r:embed="rId2"/>
+          <a:stretch>
+            <a:fillRect/>
+          </a:stretch>
+        </p:blipFill>
+        <p:spPr>
+          <a:xfrm>
+            <a:off x="858658" y="1261533"/>
+            <a:ext cx="11153192" cy="4615733"/>
+          </a:xfrm>
+          <a:prstGeom prst="rect">
+            <a:avLst/>
+          </a:prstGeom>
+        </p:spPr>
+      </p:pic>
       <p:sp>
         <p:nvSpPr>
           <p:cNvPr id="7" name="箭號: 向下 6">
@@ -3533,8 +3564,8 @@
           <p:nvPr/>
         </p:nvSpPr>
         <p:spPr>
-          <a:xfrm rot="16200000">
-            <a:off x="563034" y="5054600"/>
+          <a:xfrm>
+            <a:off x="9994900" y="3843866"/>
             <a:ext cx="330200" cy="499534"/>
           </a:xfrm>
           <a:prstGeom prst="downArrow">
@@ -3656,10 +3687,10 @@
       </p:sp>
       <p:pic>
         <p:nvPicPr>
-          <p:cNvPr id="4" name="圖片 3">
-            <a:extLst>
-              <a:ext uri="{FF2B5EF4-FFF2-40B4-BE49-F238E27FC236}">
-                <a16:creationId xmlns:a16="http://schemas.microsoft.com/office/drawing/2014/main" id="{300AFE03-09DF-4095-83AB-B9ECDFF4BBAE}"/>
+          <p:cNvPr id="6" name="圖片 5">
+            <a:extLst>
+              <a:ext uri="{FF2B5EF4-FFF2-40B4-BE49-F238E27FC236}">
+                <a16:creationId xmlns:a16="http://schemas.microsoft.com/office/drawing/2014/main" id="{0C4B6553-0C3C-4213-A74B-4FB297467066}"/>
               </a:ext>
             </a:extLst>
           </p:cNvPr>
@@ -3676,8 +3707,8 @@
         </p:blipFill>
         <p:spPr>
           <a:xfrm>
-            <a:off x="0" y="563657"/>
-            <a:ext cx="12192000" cy="5730685"/>
+            <a:off x="0" y="547774"/>
+            <a:ext cx="12192000" cy="5762451"/>
           </a:xfrm>
           <a:prstGeom prst="rect">
             <a:avLst/>
@@ -3766,10 +3797,10 @@
       </p:sp>
       <p:pic>
         <p:nvPicPr>
-          <p:cNvPr id="4" name="圖片 3">
-            <a:extLst>
-              <a:ext uri="{FF2B5EF4-FFF2-40B4-BE49-F238E27FC236}">
-                <a16:creationId xmlns:a16="http://schemas.microsoft.com/office/drawing/2014/main" id="{8056E22A-4A04-4E48-A374-B02F9B6722CA}"/>
+          <p:cNvPr id="5" name="圖片 4">
+            <a:extLst>
+              <a:ext uri="{FF2B5EF4-FFF2-40B4-BE49-F238E27FC236}">
+                <a16:creationId xmlns:a16="http://schemas.microsoft.com/office/drawing/2014/main" id="{53C7DA61-BD9D-4DAD-8225-9A3E7931B7CB}"/>
               </a:ext>
             </a:extLst>
           </p:cNvPr>
@@ -3786,8 +3817,8 @@
         </p:blipFill>
         <p:spPr>
           <a:xfrm>
-            <a:off x="0" y="550951"/>
-            <a:ext cx="12192000" cy="5756098"/>
+            <a:off x="0" y="541421"/>
+            <a:ext cx="12192000" cy="5775158"/>
           </a:xfrm>
           <a:prstGeom prst="rect">
             <a:avLst/>
@@ -3873,7 +3904,7 @@
           <a:p>
             <a:r>
               <a:rPr lang="zh-TW" altLang="en-US" sz="3200" dirty="0"/>
-              <a:t>如果覺得報告的內容還需要修改，可以點選 </a:t>
+              <a:t>如果覺得報告的內容需要修改，可以點選 </a:t>
             </a:r>
             <a:r>
               <a:rPr lang="en-US" altLang="zh-TW" sz="3200" dirty="0"/>
@@ -3890,36 +3921,6 @@
           </a:p>
         </p:txBody>
       </p:sp>
-      <p:pic>
-        <p:nvPicPr>
-          <p:cNvPr id="5" name="圖片 4">
-            <a:extLst>
-              <a:ext uri="{FF2B5EF4-FFF2-40B4-BE49-F238E27FC236}">
-                <a16:creationId xmlns:a16="http://schemas.microsoft.com/office/drawing/2014/main" id="{5BB1CD79-9C2D-4BBE-9FEE-366D53044528}"/>
-              </a:ext>
-            </a:extLst>
-          </p:cNvPr>
-          <p:cNvPicPr>
-            <a:picLocks noChangeAspect="1"/>
-          </p:cNvPicPr>
-          <p:nvPr/>
-        </p:nvPicPr>
-        <p:blipFill>
-          <a:blip r:embed="rId2"/>
-          <a:stretch>
-            <a:fillRect/>
-          </a:stretch>
-        </p:blipFill>
-        <p:spPr>
-          <a:xfrm>
-            <a:off x="270933" y="1490626"/>
-            <a:ext cx="3096057" cy="523948"/>
-          </a:xfrm>
-          <a:prstGeom prst="rect">
-            <a:avLst/>
-          </a:prstGeom>
-        </p:spPr>
-      </p:pic>
       <p:sp>
         <p:nvSpPr>
           <p:cNvPr id="6" name="箭號: 向下 5">
@@ -3934,7 +3935,7 @@
         </p:nvSpPr>
         <p:spPr>
           <a:xfrm>
-            <a:off x="2044700" y="1075796"/>
+            <a:off x="1643747" y="1143529"/>
             <a:ext cx="330200" cy="499534"/>
           </a:xfrm>
           <a:prstGeom prst="downArrow">
@@ -3976,10 +3977,39 @@
       </p:sp>
       <p:pic>
         <p:nvPicPr>
-          <p:cNvPr id="7" name="圖片 6">
-            <a:extLst>
-              <a:ext uri="{FF2B5EF4-FFF2-40B4-BE49-F238E27FC236}">
-                <a16:creationId xmlns:a16="http://schemas.microsoft.com/office/drawing/2014/main" id="{9ABC7BCA-39CB-4331-A9E4-0F8082BA02EF}"/>
+          <p:cNvPr id="8" name="圖片 7">
+            <a:extLst>
+              <a:ext uri="{FF2B5EF4-FFF2-40B4-BE49-F238E27FC236}">
+                <a16:creationId xmlns:a16="http://schemas.microsoft.com/office/drawing/2014/main" id="{13D00886-4ABB-4CD3-9C9C-E05A95911F7A}"/>
+              </a:ext>
+            </a:extLst>
+          </p:cNvPr>
+          <p:cNvPicPr>
+            <a:picLocks noChangeAspect="1"/>
+          </p:cNvPicPr>
+          <p:nvPr/>
+        </p:nvPicPr>
+        <p:blipFill rotWithShape="1">
+          <a:blip r:embed="rId2"/>
+          <a:srcRect l="88889" b="93605"/>
+          <a:stretch/>
+        </p:blipFill>
+        <p:spPr>
+          <a:xfrm>
+            <a:off x="948266" y="1643063"/>
+            <a:ext cx="2051361" cy="559246"/>
+          </a:xfrm>
+          <a:prstGeom prst="rect">
+            <a:avLst/>
+          </a:prstGeom>
+        </p:spPr>
+      </p:pic>
+      <p:pic>
+        <p:nvPicPr>
+          <p:cNvPr id="2" name="圖片 1">
+            <a:extLst>
+              <a:ext uri="{FF2B5EF4-FFF2-40B4-BE49-F238E27FC236}">
+                <a16:creationId xmlns:a16="http://schemas.microsoft.com/office/drawing/2014/main" id="{F16D3446-D512-440B-AA21-485140042757}"/>
               </a:ext>
             </a:extLst>
           </p:cNvPr>
@@ -3996,8 +4026,8 @@
         </p:blipFill>
         <p:spPr>
           <a:xfrm>
-            <a:off x="3691466" y="1075796"/>
-            <a:ext cx="7904772" cy="5257271"/>
+            <a:off x="3070380" y="1143529"/>
+            <a:ext cx="8196432" cy="5333471"/>
           </a:xfrm>
           <a:prstGeom prst="rect">
             <a:avLst/>
@@ -4008,6 +4038,1061 @@
     <p:extLst>
       <p:ext uri="{BB962C8B-B14F-4D97-AF65-F5344CB8AC3E}">
         <p14:creationId xmlns:p14="http://schemas.microsoft.com/office/powerpoint/2010/main" val="4105314388"/>
+      </p:ext>
+    </p:extLst>
+  </p:cSld>
+  <p:clrMapOvr>
+    <a:masterClrMapping/>
+  </p:clrMapOvr>
+</p:sld>
+</file>
+
+<file path=ppt/slides/slide14.xml><?xml version="1.0" encoding="utf-8"?>
+<p:sld xmlns:a="http://schemas.openxmlformats.org/drawingml/2006/main" xmlns:r="http://schemas.openxmlformats.org/officeDocument/2006/relationships" xmlns:p="http://schemas.openxmlformats.org/presentationml/2006/main">
+  <p:cSld>
+    <p:spTree>
+      <p:nvGrpSpPr>
+        <p:cNvPr id="1" name=""/>
+        <p:cNvGrpSpPr/>
+        <p:nvPr/>
+      </p:nvGrpSpPr>
+      <p:grpSpPr>
+        <a:xfrm>
+          <a:off x="0" y="0"/>
+          <a:ext cx="0" cy="0"/>
+          <a:chOff x="0" y="0"/>
+          <a:chExt cx="0" cy="0"/>
+        </a:xfrm>
+      </p:grpSpPr>
+      <p:sp>
+        <p:nvSpPr>
+          <p:cNvPr id="2" name="標題 1">
+            <a:extLst>
+              <a:ext uri="{FF2B5EF4-FFF2-40B4-BE49-F238E27FC236}">
+                <a16:creationId xmlns:a16="http://schemas.microsoft.com/office/drawing/2014/main" id="{A91AA2B3-1A83-4C27-9008-7F1AD6B1A296}"/>
+              </a:ext>
+            </a:extLst>
+          </p:cNvPr>
+          <p:cNvSpPr>
+            <a:spLocks noGrp="1"/>
+          </p:cNvSpPr>
+          <p:nvPr>
+            <p:ph type="title"/>
+          </p:nvPr>
+        </p:nvSpPr>
+        <p:spPr>
+          <a:xfrm>
+            <a:off x="838200" y="4261378"/>
+            <a:ext cx="10515600" cy="1325563"/>
+          </a:xfrm>
+        </p:spPr>
+        <p:txBody>
+          <a:bodyPr/>
+          <a:lstStyle/>
+          <a:p>
+            <a:r>
+              <a:rPr lang="zh-TW" altLang="en-US" b="1" dirty="0"/>
+              <a:t>整體進度上傳</a:t>
+            </a:r>
+          </a:p>
+        </p:txBody>
+      </p:sp>
+    </p:spTree>
+    <p:extLst>
+      <p:ext uri="{BB962C8B-B14F-4D97-AF65-F5344CB8AC3E}">
+        <p14:creationId xmlns:p14="http://schemas.microsoft.com/office/powerpoint/2010/main" val="2983189772"/>
+      </p:ext>
+    </p:extLst>
+  </p:cSld>
+  <p:clrMapOvr>
+    <a:masterClrMapping/>
+  </p:clrMapOvr>
+</p:sld>
+</file>
+
+<file path=ppt/slides/slide15.xml><?xml version="1.0" encoding="utf-8"?>
+<p:sld xmlns:a="http://schemas.openxmlformats.org/drawingml/2006/main" xmlns:r="http://schemas.openxmlformats.org/officeDocument/2006/relationships" xmlns:p="http://schemas.openxmlformats.org/presentationml/2006/main">
+  <p:cSld>
+    <p:spTree>
+      <p:nvGrpSpPr>
+        <p:cNvPr id="1" name=""/>
+        <p:cNvGrpSpPr/>
+        <p:nvPr/>
+      </p:nvGrpSpPr>
+      <p:grpSpPr>
+        <a:xfrm>
+          <a:off x="0" y="0"/>
+          <a:ext cx="0" cy="0"/>
+          <a:chOff x="0" y="0"/>
+          <a:chExt cx="0" cy="0"/>
+        </a:xfrm>
+      </p:grpSpPr>
+      <p:pic>
+        <p:nvPicPr>
+          <p:cNvPr id="4" name="圖片 3">
+            <a:extLst>
+              <a:ext uri="{FF2B5EF4-FFF2-40B4-BE49-F238E27FC236}">
+                <a16:creationId xmlns:a16="http://schemas.microsoft.com/office/drawing/2014/main" id="{E461586F-B449-43AF-94B8-932C28D7F12A}"/>
+              </a:ext>
+            </a:extLst>
+          </p:cNvPr>
+          <p:cNvPicPr>
+            <a:picLocks noChangeAspect="1"/>
+          </p:cNvPicPr>
+          <p:nvPr/>
+        </p:nvPicPr>
+        <p:blipFill>
+          <a:blip r:embed="rId2"/>
+          <a:stretch>
+            <a:fillRect/>
+          </a:stretch>
+        </p:blipFill>
+        <p:spPr>
+          <a:xfrm>
+            <a:off x="804332" y="962925"/>
+            <a:ext cx="9895409" cy="5310875"/>
+          </a:xfrm>
+          <a:prstGeom prst="rect">
+            <a:avLst/>
+          </a:prstGeom>
+        </p:spPr>
+      </p:pic>
+      <p:sp>
+        <p:nvSpPr>
+          <p:cNvPr id="5" name="標題 1">
+            <a:extLst>
+              <a:ext uri="{FF2B5EF4-FFF2-40B4-BE49-F238E27FC236}">
+                <a16:creationId xmlns:a16="http://schemas.microsoft.com/office/drawing/2014/main" id="{637DED57-B5B6-47B7-AF15-57A4EAE599A3}"/>
+              </a:ext>
+            </a:extLst>
+          </p:cNvPr>
+          <p:cNvSpPr txBox="1">
+            <a:spLocks/>
+          </p:cNvSpPr>
+          <p:nvPr/>
+        </p:nvSpPr>
+        <p:spPr>
+          <a:xfrm>
+            <a:off x="728134" y="0"/>
+            <a:ext cx="10515600" cy="1325563"/>
+          </a:xfrm>
+          <a:prstGeom prst="rect">
+            <a:avLst/>
+          </a:prstGeom>
+        </p:spPr>
+        <p:txBody>
+          <a:bodyPr vert="horz" lIns="91440" tIns="45720" rIns="91440" bIns="45720" rtlCol="0" anchor="ctr">
+            <a:normAutofit/>
+          </a:bodyPr>
+          <a:lstStyle>
+            <a:lvl1pPr algn="l" defTabSz="914400" rtl="0" eaLnBrk="1" latinLnBrk="0" hangingPunct="1">
+              <a:lnSpc>
+                <a:spcPct val="90000"/>
+              </a:lnSpc>
+              <a:spcBef>
+                <a:spcPct val="0"/>
+              </a:spcBef>
+              <a:buNone/>
+              <a:defRPr sz="4400" kern="1200">
+                <a:solidFill>
+                  <a:schemeClr val="tx1"/>
+                </a:solidFill>
+                <a:latin typeface="+mj-lt"/>
+                <a:ea typeface="+mj-ea"/>
+                <a:cs typeface="+mj-cs"/>
+              </a:defRPr>
+            </a:lvl1pPr>
+          </a:lstStyle>
+          <a:p>
+            <a:r>
+              <a:rPr lang="zh-TW" altLang="en-US" sz="3200" dirty="0"/>
+              <a:t>點選 </a:t>
+            </a:r>
+            <a:r>
+              <a:rPr lang="en-US" altLang="zh-TW" sz="3200" dirty="0"/>
+              <a:t>[</a:t>
+            </a:r>
+            <a:r>
+              <a:rPr lang="zh-TW" altLang="en-US" sz="3200" dirty="0"/>
+              <a:t>整體進度上傳</a:t>
+            </a:r>
+            <a:r>
+              <a:rPr lang="en-US" altLang="zh-TW" sz="3200" dirty="0"/>
+              <a:t>]</a:t>
+            </a:r>
+          </a:p>
+        </p:txBody>
+      </p:sp>
+      <p:sp>
+        <p:nvSpPr>
+          <p:cNvPr id="6" name="矩形 5">
+            <a:extLst>
+              <a:ext uri="{FF2B5EF4-FFF2-40B4-BE49-F238E27FC236}">
+                <a16:creationId xmlns:a16="http://schemas.microsoft.com/office/drawing/2014/main" id="{2E621A24-1E0A-45B2-883D-99977B828628}"/>
+              </a:ext>
+            </a:extLst>
+          </p:cNvPr>
+          <p:cNvSpPr/>
+          <p:nvPr/>
+        </p:nvSpPr>
+        <p:spPr>
+          <a:xfrm>
+            <a:off x="9586027" y="1084617"/>
+            <a:ext cx="794108" cy="240946"/>
+          </a:xfrm>
+          <a:prstGeom prst="rect">
+            <a:avLst/>
+          </a:prstGeom>
+          <a:noFill/>
+          <a:ln>
+            <a:solidFill>
+              <a:srgbClr val="FF0000"/>
+            </a:solidFill>
+          </a:ln>
+        </p:spPr>
+        <p:style>
+          <a:lnRef idx="2">
+            <a:schemeClr val="accent1">
+              <a:shade val="50000"/>
+            </a:schemeClr>
+          </a:lnRef>
+          <a:fillRef idx="1">
+            <a:schemeClr val="accent1"/>
+          </a:fillRef>
+          <a:effectRef idx="0">
+            <a:schemeClr val="accent1"/>
+          </a:effectRef>
+          <a:fontRef idx="minor">
+            <a:schemeClr val="lt1"/>
+          </a:fontRef>
+        </p:style>
+        <p:txBody>
+          <a:bodyPr rtlCol="0" anchor="ctr"/>
+          <a:lstStyle/>
+          <a:p>
+            <a:pPr algn="ctr"/>
+            <a:endParaRPr lang="zh-TW" altLang="en-US"/>
+          </a:p>
+        </p:txBody>
+      </p:sp>
+    </p:spTree>
+    <p:extLst>
+      <p:ext uri="{BB962C8B-B14F-4D97-AF65-F5344CB8AC3E}">
+        <p14:creationId xmlns:p14="http://schemas.microsoft.com/office/powerpoint/2010/main" val="836958398"/>
+      </p:ext>
+    </p:extLst>
+  </p:cSld>
+  <p:clrMapOvr>
+    <a:masterClrMapping/>
+  </p:clrMapOvr>
+</p:sld>
+</file>
+
+<file path=ppt/slides/slide16.xml><?xml version="1.0" encoding="utf-8"?>
+<p:sld xmlns:a="http://schemas.openxmlformats.org/drawingml/2006/main" xmlns:r="http://schemas.openxmlformats.org/officeDocument/2006/relationships" xmlns:p="http://schemas.openxmlformats.org/presentationml/2006/main">
+  <p:cSld>
+    <p:spTree>
+      <p:nvGrpSpPr>
+        <p:cNvPr id="1" name=""/>
+        <p:cNvGrpSpPr/>
+        <p:nvPr/>
+      </p:nvGrpSpPr>
+      <p:grpSpPr>
+        <a:xfrm>
+          <a:off x="0" y="0"/>
+          <a:ext cx="0" cy="0"/>
+          <a:chOff x="0" y="0"/>
+          <a:chExt cx="0" cy="0"/>
+        </a:xfrm>
+      </p:grpSpPr>
+      <p:pic>
+        <p:nvPicPr>
+          <p:cNvPr id="4" name="圖片 3">
+            <a:extLst>
+              <a:ext uri="{FF2B5EF4-FFF2-40B4-BE49-F238E27FC236}">
+                <a16:creationId xmlns:a16="http://schemas.microsoft.com/office/drawing/2014/main" id="{E461586F-B449-43AF-94B8-932C28D7F12A}"/>
+              </a:ext>
+            </a:extLst>
+          </p:cNvPr>
+          <p:cNvPicPr>
+            <a:picLocks noChangeAspect="1"/>
+          </p:cNvPicPr>
+          <p:nvPr/>
+        </p:nvPicPr>
+        <p:blipFill>
+          <a:blip r:embed="rId2"/>
+          <a:stretch>
+            <a:fillRect/>
+          </a:stretch>
+        </p:blipFill>
+        <p:spPr>
+          <a:xfrm>
+            <a:off x="804332" y="962925"/>
+            <a:ext cx="9895409" cy="5310875"/>
+          </a:xfrm>
+          <a:prstGeom prst="rect">
+            <a:avLst/>
+          </a:prstGeom>
+        </p:spPr>
+      </p:pic>
+      <p:sp>
+        <p:nvSpPr>
+          <p:cNvPr id="5" name="標題 1">
+            <a:extLst>
+              <a:ext uri="{FF2B5EF4-FFF2-40B4-BE49-F238E27FC236}">
+                <a16:creationId xmlns:a16="http://schemas.microsoft.com/office/drawing/2014/main" id="{637DED57-B5B6-47B7-AF15-57A4EAE599A3}"/>
+              </a:ext>
+            </a:extLst>
+          </p:cNvPr>
+          <p:cNvSpPr txBox="1">
+            <a:spLocks/>
+          </p:cNvSpPr>
+          <p:nvPr/>
+        </p:nvSpPr>
+        <p:spPr>
+          <a:xfrm>
+            <a:off x="728134" y="0"/>
+            <a:ext cx="10515600" cy="1325563"/>
+          </a:xfrm>
+          <a:prstGeom prst="rect">
+            <a:avLst/>
+          </a:prstGeom>
+        </p:spPr>
+        <p:txBody>
+          <a:bodyPr vert="horz" lIns="91440" tIns="45720" rIns="91440" bIns="45720" rtlCol="0" anchor="ctr">
+            <a:normAutofit/>
+          </a:bodyPr>
+          <a:lstStyle>
+            <a:lvl1pPr algn="l" defTabSz="914400" rtl="0" eaLnBrk="1" latinLnBrk="0" hangingPunct="1">
+              <a:lnSpc>
+                <a:spcPct val="90000"/>
+              </a:lnSpc>
+              <a:spcBef>
+                <a:spcPct val="0"/>
+              </a:spcBef>
+              <a:buNone/>
+              <a:defRPr sz="4400" kern="1200">
+                <a:solidFill>
+                  <a:schemeClr val="tx1"/>
+                </a:solidFill>
+                <a:latin typeface="+mj-lt"/>
+                <a:ea typeface="+mj-ea"/>
+                <a:cs typeface="+mj-cs"/>
+              </a:defRPr>
+            </a:lvl1pPr>
+          </a:lstStyle>
+          <a:p>
+            <a:r>
+              <a:rPr lang="zh-TW" altLang="en-US" sz="3200" dirty="0"/>
+              <a:t>點選 </a:t>
+            </a:r>
+            <a:r>
+              <a:rPr lang="en-US" altLang="zh-TW" sz="3200" dirty="0"/>
+              <a:t>Follow-up</a:t>
+            </a:r>
+            <a:r>
+              <a:rPr lang="zh-TW" altLang="en-US" sz="3200" dirty="0"/>
+              <a:t>，撰寫上週的 </a:t>
+            </a:r>
+            <a:r>
+              <a:rPr lang="en-US" altLang="zh-TW" sz="3200" dirty="0"/>
+              <a:t>Follow-up Items</a:t>
+            </a:r>
+          </a:p>
+        </p:txBody>
+      </p:sp>
+      <p:sp>
+        <p:nvSpPr>
+          <p:cNvPr id="6" name="矩形 5">
+            <a:extLst>
+              <a:ext uri="{FF2B5EF4-FFF2-40B4-BE49-F238E27FC236}">
+                <a16:creationId xmlns:a16="http://schemas.microsoft.com/office/drawing/2014/main" id="{2E621A24-1E0A-45B2-883D-99977B828628}"/>
+              </a:ext>
+            </a:extLst>
+          </p:cNvPr>
+          <p:cNvSpPr/>
+          <p:nvPr/>
+        </p:nvSpPr>
+        <p:spPr>
+          <a:xfrm>
+            <a:off x="882293" y="2288487"/>
+            <a:ext cx="3046239" cy="1792445"/>
+          </a:xfrm>
+          <a:prstGeom prst="rect">
+            <a:avLst/>
+          </a:prstGeom>
+          <a:noFill/>
+          <a:ln>
+            <a:solidFill>
+              <a:srgbClr val="FF0000"/>
+            </a:solidFill>
+          </a:ln>
+        </p:spPr>
+        <p:style>
+          <a:lnRef idx="2">
+            <a:schemeClr val="accent1">
+              <a:shade val="50000"/>
+            </a:schemeClr>
+          </a:lnRef>
+          <a:fillRef idx="1">
+            <a:schemeClr val="accent1"/>
+          </a:fillRef>
+          <a:effectRef idx="0">
+            <a:schemeClr val="accent1"/>
+          </a:effectRef>
+          <a:fontRef idx="minor">
+            <a:schemeClr val="lt1"/>
+          </a:fontRef>
+        </p:style>
+        <p:txBody>
+          <a:bodyPr rtlCol="0" anchor="ctr"/>
+          <a:lstStyle/>
+          <a:p>
+            <a:pPr algn="ctr"/>
+            <a:endParaRPr lang="zh-TW" altLang="en-US"/>
+          </a:p>
+        </p:txBody>
+      </p:sp>
+    </p:spTree>
+    <p:extLst>
+      <p:ext uri="{BB962C8B-B14F-4D97-AF65-F5344CB8AC3E}">
+        <p14:creationId xmlns:p14="http://schemas.microsoft.com/office/powerpoint/2010/main" val="3422103118"/>
+      </p:ext>
+    </p:extLst>
+  </p:cSld>
+  <p:clrMapOvr>
+    <a:masterClrMapping/>
+  </p:clrMapOvr>
+</p:sld>
+</file>
+
+<file path=ppt/slides/slide17.xml><?xml version="1.0" encoding="utf-8"?>
+<p:sld xmlns:a="http://schemas.openxmlformats.org/drawingml/2006/main" xmlns:r="http://schemas.openxmlformats.org/officeDocument/2006/relationships" xmlns:p="http://schemas.openxmlformats.org/presentationml/2006/main">
+  <p:cSld>
+    <p:spTree>
+      <p:nvGrpSpPr>
+        <p:cNvPr id="1" name=""/>
+        <p:cNvGrpSpPr/>
+        <p:nvPr/>
+      </p:nvGrpSpPr>
+      <p:grpSpPr>
+        <a:xfrm>
+          <a:off x="0" y="0"/>
+          <a:ext cx="0" cy="0"/>
+          <a:chOff x="0" y="0"/>
+          <a:chExt cx="0" cy="0"/>
+        </a:xfrm>
+      </p:grpSpPr>
+      <p:sp>
+        <p:nvSpPr>
+          <p:cNvPr id="5" name="矩形 4">
+            <a:extLst>
+              <a:ext uri="{FF2B5EF4-FFF2-40B4-BE49-F238E27FC236}">
+                <a16:creationId xmlns:a16="http://schemas.microsoft.com/office/drawing/2014/main" id="{27E6FEAD-BD3F-41DC-8656-D04002624E22}"/>
+              </a:ext>
+            </a:extLst>
+          </p:cNvPr>
+          <p:cNvSpPr/>
+          <p:nvPr/>
+        </p:nvSpPr>
+        <p:spPr>
+          <a:xfrm>
+            <a:off x="2637366" y="720522"/>
+            <a:ext cx="6917267" cy="2292935"/>
+          </a:xfrm>
+          <a:prstGeom prst="rect">
+            <a:avLst/>
+          </a:prstGeom>
+          <a:solidFill>
+            <a:schemeClr val="accent1">
+              <a:lumMod val="20000"/>
+              <a:lumOff val="80000"/>
+            </a:schemeClr>
+          </a:solidFill>
+        </p:spPr>
+        <p:txBody>
+          <a:bodyPr wrap="square">
+            <a:spAutoFit/>
+          </a:bodyPr>
+          <a:lstStyle/>
+          <a:p>
+            <a:r>
+              <a:rPr lang="en-US" altLang="zh-TW" sz="1100" dirty="0"/>
+              <a:t>## 1. </a:t>
+            </a:r>
+            <a:r>
+              <a:rPr lang="zh-TW" altLang="en-US" sz="1100" dirty="0"/>
+              <a:t>上次會議 </a:t>
+            </a:r>
+            <a:r>
+              <a:rPr lang="en-US" altLang="zh-TW" sz="1100" dirty="0"/>
+              <a:t>Follow-up</a:t>
+            </a:r>
+          </a:p>
+          <a:p>
+            <a:r>
+              <a:rPr lang="en-US" altLang="zh-TW" sz="1100" dirty="0"/>
+              <a:t> </a:t>
+            </a:r>
+          </a:p>
+          <a:p>
+            <a:r>
+              <a:rPr lang="en-US" altLang="zh-TW" sz="1100" dirty="0"/>
+              <a:t>* </a:t>
+            </a:r>
+            <a:r>
+              <a:rPr lang="zh-TW" altLang="en-US" sz="1100" dirty="0"/>
+              <a:t>項目 </a:t>
+            </a:r>
+            <a:r>
+              <a:rPr lang="en-US" altLang="zh-TW" sz="1100" dirty="0"/>
+              <a:t>1</a:t>
+            </a:r>
+            <a:r>
+              <a:rPr lang="zh-TW" altLang="en-US" sz="1100" dirty="0"/>
+              <a:t>｜**</a:t>
+            </a:r>
+            <a:r>
+              <a:rPr lang="en-US" altLang="zh-TW" sz="1100" dirty="0"/>
+              <a:t>[</a:t>
+            </a:r>
+            <a:r>
+              <a:rPr lang="zh-TW" altLang="en-US" sz="1100" dirty="0"/>
+              <a:t>事項名稱</a:t>
+            </a:r>
+            <a:r>
+              <a:rPr lang="en-US" altLang="zh-TW" sz="1100" dirty="0"/>
+              <a:t>]**</a:t>
+            </a:r>
+            <a:endParaRPr lang="zh-TW" altLang="en-US" sz="1100" dirty="0"/>
+          </a:p>
+          <a:p>
+            <a:r>
+              <a:rPr lang="zh-TW" altLang="en-US" sz="1100" dirty="0"/>
+              <a:t>  * </a:t>
+            </a:r>
+            <a:r>
+              <a:rPr lang="en-US" altLang="zh-TW" sz="1100" dirty="0"/>
+              <a:t>Owner</a:t>
+            </a:r>
+            <a:r>
+              <a:rPr lang="zh-TW" altLang="en-US" sz="1100" dirty="0"/>
+              <a:t>：</a:t>
+            </a:r>
+            <a:r>
+              <a:rPr lang="en-US" altLang="zh-TW" sz="1100" dirty="0"/>
+              <a:t>[</a:t>
+            </a:r>
+            <a:r>
+              <a:rPr lang="zh-TW" altLang="en-US" sz="1100" dirty="0"/>
+              <a:t>姓名</a:t>
+            </a:r>
+            <a:r>
+              <a:rPr lang="en-US" altLang="zh-TW" sz="1100" dirty="0"/>
+              <a:t>]</a:t>
+            </a:r>
+            <a:r>
+              <a:rPr lang="zh-TW" altLang="en-US" sz="1100" dirty="0"/>
+              <a:t>｜狀態：✅ </a:t>
+            </a:r>
+            <a:r>
+              <a:rPr lang="en-US" altLang="zh-TW" sz="1100" dirty="0"/>
+              <a:t>Done</a:t>
+            </a:r>
+          </a:p>
+          <a:p>
+            <a:r>
+              <a:rPr lang="en-US" altLang="zh-TW" sz="1100" dirty="0"/>
+              <a:t>  * Result</a:t>
+            </a:r>
+            <a:r>
+              <a:rPr lang="zh-TW" altLang="en-US" sz="1100" dirty="0"/>
+              <a:t>：</a:t>
+            </a:r>
+            <a:r>
+              <a:rPr lang="en-US" altLang="zh-TW" sz="1100" dirty="0"/>
+              <a:t>[</a:t>
+            </a:r>
+            <a:r>
+              <a:rPr lang="zh-TW" altLang="en-US" sz="1100" dirty="0"/>
+              <a:t>簡短說明成果</a:t>
+            </a:r>
+            <a:r>
+              <a:rPr lang="en-US" altLang="zh-TW" sz="1100" dirty="0"/>
+              <a:t>]</a:t>
+            </a:r>
+          </a:p>
+          <a:p>
+            <a:r>
+              <a:rPr lang="en-US" altLang="zh-TW" sz="1100" dirty="0"/>
+              <a:t> </a:t>
+            </a:r>
+          </a:p>
+          <a:p>
+            <a:r>
+              <a:rPr lang="zh-TW" altLang="en-US" sz="1100" dirty="0"/>
+              <a:t>* 項目 </a:t>
+            </a:r>
+            <a:r>
+              <a:rPr lang="en-US" altLang="zh-TW" sz="1100" dirty="0"/>
+              <a:t>2</a:t>
+            </a:r>
+            <a:r>
+              <a:rPr lang="zh-TW" altLang="en-US" sz="1100" dirty="0"/>
+              <a:t>｜**</a:t>
+            </a:r>
+            <a:r>
+              <a:rPr lang="en-US" altLang="zh-TW" sz="1100" dirty="0"/>
+              <a:t>[</a:t>
+            </a:r>
+            <a:r>
+              <a:rPr lang="zh-TW" altLang="en-US" sz="1100" dirty="0"/>
+              <a:t>事項名稱</a:t>
+            </a:r>
+            <a:r>
+              <a:rPr lang="en-US" altLang="zh-TW" sz="1100" dirty="0"/>
+              <a:t>]**</a:t>
+            </a:r>
+            <a:endParaRPr lang="zh-TW" altLang="en-US" sz="1100" dirty="0"/>
+          </a:p>
+          <a:p>
+            <a:r>
+              <a:rPr lang="zh-TW" altLang="en-US" sz="1100" dirty="0"/>
+              <a:t>  * </a:t>
+            </a:r>
+            <a:r>
+              <a:rPr lang="en-US" altLang="zh-TW" sz="1100" dirty="0"/>
+              <a:t>Owner</a:t>
+            </a:r>
+            <a:r>
+              <a:rPr lang="zh-TW" altLang="en-US" sz="1100" dirty="0"/>
+              <a:t>：</a:t>
+            </a:r>
+            <a:r>
+              <a:rPr lang="en-US" altLang="zh-TW" sz="1100" dirty="0"/>
+              <a:t>[</a:t>
+            </a:r>
+            <a:r>
+              <a:rPr lang="zh-TW" altLang="en-US" sz="1100" dirty="0"/>
+              <a:t>姓名</a:t>
+            </a:r>
+            <a:r>
+              <a:rPr lang="en-US" altLang="zh-TW" sz="1100" dirty="0"/>
+              <a:t>]</a:t>
+            </a:r>
+            <a:r>
+              <a:rPr lang="zh-TW" altLang="en-US" sz="1100" dirty="0"/>
+              <a:t>｜狀態：✅ </a:t>
+            </a:r>
+            <a:r>
+              <a:rPr lang="en-US" altLang="zh-TW" sz="1100" dirty="0"/>
+              <a:t>Done</a:t>
+            </a:r>
+          </a:p>
+          <a:p>
+            <a:r>
+              <a:rPr lang="en-US" altLang="zh-TW" sz="1100" dirty="0"/>
+              <a:t>  * Result</a:t>
+            </a:r>
+            <a:r>
+              <a:rPr lang="zh-TW" altLang="en-US" sz="1100" dirty="0"/>
+              <a:t>：</a:t>
+            </a:r>
+            <a:r>
+              <a:rPr lang="en-US" altLang="zh-TW" sz="1100" dirty="0"/>
+              <a:t>[</a:t>
+            </a:r>
+            <a:r>
+              <a:rPr lang="zh-TW" altLang="en-US" sz="1100" dirty="0"/>
+              <a:t>簡短說明成果</a:t>
+            </a:r>
+            <a:r>
+              <a:rPr lang="en-US" altLang="zh-TW" sz="1100" dirty="0"/>
+              <a:t>]</a:t>
+            </a:r>
+          </a:p>
+          <a:p>
+            <a:r>
+              <a:rPr lang="en-US" altLang="zh-TW" sz="1100" dirty="0"/>
+              <a:t> </a:t>
+            </a:r>
+          </a:p>
+          <a:p>
+            <a:r>
+              <a:rPr lang="en-US" altLang="zh-TW" sz="1100" dirty="0"/>
+              <a:t>&gt; </a:t>
+            </a:r>
+            <a:r>
+              <a:rPr lang="zh-TW" altLang="en-US" sz="1100" dirty="0"/>
+              <a:t>**補充說明**：  </a:t>
+            </a:r>
+          </a:p>
+          <a:p>
+            <a:r>
+              <a:rPr lang="en-US" altLang="zh-TW" sz="1100" dirty="0"/>
+              <a:t>&gt; [</a:t>
+            </a:r>
+            <a:r>
+              <a:rPr lang="zh-TW" altLang="en-US" sz="1100" dirty="0"/>
+              <a:t>整體性的補充說明，無則可刪除</a:t>
+            </a:r>
+            <a:r>
+              <a:rPr lang="en-US" altLang="zh-TW" sz="1100" dirty="0"/>
+              <a:t>]</a:t>
+            </a:r>
+          </a:p>
+          <a:p>
+            <a:r>
+              <a:rPr lang="en-US" altLang="zh-TW" sz="1100" dirty="0"/>
+              <a:t> </a:t>
+            </a:r>
+          </a:p>
+        </p:txBody>
+      </p:sp>
+      <p:sp>
+        <p:nvSpPr>
+          <p:cNvPr id="6" name="矩形 5">
+            <a:extLst>
+              <a:ext uri="{FF2B5EF4-FFF2-40B4-BE49-F238E27FC236}">
+                <a16:creationId xmlns:a16="http://schemas.microsoft.com/office/drawing/2014/main" id="{508BDD3C-CCA1-4249-9A7E-8CD25AE7C62F}"/>
+              </a:ext>
+            </a:extLst>
+          </p:cNvPr>
+          <p:cNvSpPr/>
+          <p:nvPr/>
+        </p:nvSpPr>
+        <p:spPr>
+          <a:xfrm>
+            <a:off x="3849230" y="120446"/>
+            <a:ext cx="4493538" cy="461665"/>
+          </a:xfrm>
+          <a:prstGeom prst="rect">
+            <a:avLst/>
+          </a:prstGeom>
+        </p:spPr>
+        <p:txBody>
+          <a:bodyPr wrap="none">
+            <a:spAutoFit/>
+          </a:bodyPr>
+          <a:lstStyle/>
+          <a:p>
+            <a:r>
+              <a:rPr lang="zh-TW" altLang="en-US" sz="2400" dirty="0"/>
+              <a:t>請參考下方的範例模板進行填寫</a:t>
+            </a:r>
+          </a:p>
+        </p:txBody>
+      </p:sp>
+    </p:spTree>
+    <p:extLst>
+      <p:ext uri="{BB962C8B-B14F-4D97-AF65-F5344CB8AC3E}">
+        <p14:creationId xmlns:p14="http://schemas.microsoft.com/office/powerpoint/2010/main" val="3384150399"/>
+      </p:ext>
+    </p:extLst>
+  </p:cSld>
+  <p:clrMapOvr>
+    <a:masterClrMapping/>
+  </p:clrMapOvr>
+</p:sld>
+</file>
+
+<file path=ppt/slides/slide18.xml><?xml version="1.0" encoding="utf-8"?>
+<p:sld xmlns:a="http://schemas.openxmlformats.org/drawingml/2006/main" xmlns:r="http://schemas.openxmlformats.org/officeDocument/2006/relationships" xmlns:p="http://schemas.openxmlformats.org/presentationml/2006/main">
+  <p:cSld>
+    <p:spTree>
+      <p:nvGrpSpPr>
+        <p:cNvPr id="1" name=""/>
+        <p:cNvGrpSpPr/>
+        <p:nvPr/>
+      </p:nvGrpSpPr>
+      <p:grpSpPr>
+        <a:xfrm>
+          <a:off x="0" y="0"/>
+          <a:ext cx="0" cy="0"/>
+          <a:chOff x="0" y="0"/>
+          <a:chExt cx="0" cy="0"/>
+        </a:xfrm>
+      </p:grpSpPr>
+      <p:pic>
+        <p:nvPicPr>
+          <p:cNvPr id="2" name="圖片 1">
+            <a:extLst>
+              <a:ext uri="{FF2B5EF4-FFF2-40B4-BE49-F238E27FC236}">
+                <a16:creationId xmlns:a16="http://schemas.microsoft.com/office/drawing/2014/main" id="{FCA80F9B-80A6-48E4-AF06-DDFE9594A22C}"/>
+              </a:ext>
+            </a:extLst>
+          </p:cNvPr>
+          <p:cNvPicPr>
+            <a:picLocks noChangeAspect="1"/>
+          </p:cNvPicPr>
+          <p:nvPr/>
+        </p:nvPicPr>
+        <p:blipFill>
+          <a:blip r:embed="rId2"/>
+          <a:stretch>
+            <a:fillRect/>
+          </a:stretch>
+        </p:blipFill>
+        <p:spPr>
+          <a:xfrm>
+            <a:off x="728134" y="1106213"/>
+            <a:ext cx="9508066" cy="5516363"/>
+          </a:xfrm>
+          <a:prstGeom prst="rect">
+            <a:avLst/>
+          </a:prstGeom>
+        </p:spPr>
+      </p:pic>
+      <p:sp>
+        <p:nvSpPr>
+          <p:cNvPr id="5" name="標題 1">
+            <a:extLst>
+              <a:ext uri="{FF2B5EF4-FFF2-40B4-BE49-F238E27FC236}">
+                <a16:creationId xmlns:a16="http://schemas.microsoft.com/office/drawing/2014/main" id="{637DED57-B5B6-47B7-AF15-57A4EAE599A3}"/>
+              </a:ext>
+            </a:extLst>
+          </p:cNvPr>
+          <p:cNvSpPr txBox="1">
+            <a:spLocks/>
+          </p:cNvSpPr>
+          <p:nvPr/>
+        </p:nvSpPr>
+        <p:spPr>
+          <a:xfrm>
+            <a:off x="728134" y="0"/>
+            <a:ext cx="10515600" cy="1325563"/>
+          </a:xfrm>
+          <a:prstGeom prst="rect">
+            <a:avLst/>
+          </a:prstGeom>
+        </p:spPr>
+        <p:txBody>
+          <a:bodyPr vert="horz" lIns="91440" tIns="45720" rIns="91440" bIns="45720" rtlCol="0" anchor="ctr">
+            <a:normAutofit/>
+          </a:bodyPr>
+          <a:lstStyle>
+            <a:lvl1pPr algn="l" defTabSz="914400" rtl="0" eaLnBrk="1" latinLnBrk="0" hangingPunct="1">
+              <a:lnSpc>
+                <a:spcPct val="90000"/>
+              </a:lnSpc>
+              <a:spcBef>
+                <a:spcPct val="0"/>
+              </a:spcBef>
+              <a:buNone/>
+              <a:defRPr sz="4400" kern="1200">
+                <a:solidFill>
+                  <a:schemeClr val="tx1"/>
+                </a:solidFill>
+                <a:latin typeface="+mj-lt"/>
+                <a:ea typeface="+mj-ea"/>
+                <a:cs typeface="+mj-cs"/>
+              </a:defRPr>
+            </a:lvl1pPr>
+          </a:lstStyle>
+          <a:p>
+            <a:r>
+              <a:rPr lang="zh-TW" altLang="en-US" sz="3200" dirty="0"/>
+              <a:t>請按照模板進行填寫，並點選 </a:t>
+            </a:r>
+            <a:r>
+              <a:rPr lang="en-US" altLang="zh-TW" sz="3200" dirty="0"/>
+              <a:t>[</a:t>
+            </a:r>
+            <a:r>
+              <a:rPr lang="zh-TW" altLang="en-US" sz="3200" dirty="0"/>
+              <a:t>儲存</a:t>
+            </a:r>
+            <a:r>
+              <a:rPr lang="en-US" altLang="zh-TW" sz="3200" dirty="0"/>
+              <a:t>]</a:t>
+            </a:r>
+            <a:r>
+              <a:rPr lang="zh-TW" altLang="en-US" sz="3200" dirty="0"/>
+              <a:t> 與 </a:t>
+            </a:r>
+            <a:r>
+              <a:rPr lang="en-US" altLang="zh-TW" sz="3200" dirty="0"/>
+              <a:t>[</a:t>
+            </a:r>
+            <a:r>
+              <a:rPr lang="zh-TW" altLang="en-US" sz="3200" dirty="0"/>
+              <a:t>產生投影片</a:t>
+            </a:r>
+            <a:r>
+              <a:rPr lang="en-US" altLang="zh-TW" sz="3200" dirty="0"/>
+              <a:t>]</a:t>
+            </a:r>
+          </a:p>
+        </p:txBody>
+      </p:sp>
+      <p:sp>
+        <p:nvSpPr>
+          <p:cNvPr id="7" name="箭號: 向下 6">
+            <a:extLst>
+              <a:ext uri="{FF2B5EF4-FFF2-40B4-BE49-F238E27FC236}">
+                <a16:creationId xmlns:a16="http://schemas.microsoft.com/office/drawing/2014/main" id="{865A7498-F918-4D98-839B-BF4F0D66204E}"/>
+              </a:ext>
+            </a:extLst>
+          </p:cNvPr>
+          <p:cNvSpPr/>
+          <p:nvPr/>
+        </p:nvSpPr>
+        <p:spPr>
+          <a:xfrm>
+            <a:off x="9529233" y="1490133"/>
+            <a:ext cx="330200" cy="372533"/>
+          </a:xfrm>
+          <a:prstGeom prst="downArrow">
+            <a:avLst/>
+          </a:prstGeom>
+          <a:solidFill>
+            <a:srgbClr val="FF0000"/>
+          </a:solidFill>
+          <a:ln>
+            <a:solidFill>
+              <a:srgbClr val="FF0000"/>
+            </a:solidFill>
+          </a:ln>
+        </p:spPr>
+        <p:style>
+          <a:lnRef idx="2">
+            <a:schemeClr val="accent1">
+              <a:shade val="50000"/>
+            </a:schemeClr>
+          </a:lnRef>
+          <a:fillRef idx="1">
+            <a:schemeClr val="accent1"/>
+          </a:fillRef>
+          <a:effectRef idx="0">
+            <a:schemeClr val="accent1"/>
+          </a:effectRef>
+          <a:fontRef idx="minor">
+            <a:schemeClr val="lt1"/>
+          </a:fontRef>
+        </p:style>
+        <p:txBody>
+          <a:bodyPr rtlCol="0" anchor="ctr"/>
+          <a:lstStyle/>
+          <a:p>
+            <a:pPr algn="ctr"/>
+            <a:endParaRPr lang="zh-TW" altLang="en-US"/>
+          </a:p>
+        </p:txBody>
+      </p:sp>
+    </p:spTree>
+    <p:extLst>
+      <p:ext uri="{BB962C8B-B14F-4D97-AF65-F5344CB8AC3E}">
+        <p14:creationId xmlns:p14="http://schemas.microsoft.com/office/powerpoint/2010/main" val="188236029"/>
+      </p:ext>
+    </p:extLst>
+  </p:cSld>
+  <p:clrMapOvr>
+    <a:masterClrMapping/>
+  </p:clrMapOvr>
+</p:sld>
+</file>
+
+<file path=ppt/slides/slide19.xml><?xml version="1.0" encoding="utf-8"?>
+<p:sld xmlns:a="http://schemas.openxmlformats.org/drawingml/2006/main" xmlns:r="http://schemas.openxmlformats.org/officeDocument/2006/relationships" xmlns:p="http://schemas.openxmlformats.org/presentationml/2006/main">
+  <p:cSld>
+    <p:spTree>
+      <p:nvGrpSpPr>
+        <p:cNvPr id="1" name=""/>
+        <p:cNvGrpSpPr/>
+        <p:nvPr/>
+      </p:nvGrpSpPr>
+      <p:grpSpPr>
+        <a:xfrm>
+          <a:off x="0" y="0"/>
+          <a:ext cx="0" cy="0"/>
+          <a:chOff x="0" y="0"/>
+          <a:chExt cx="0" cy="0"/>
+        </a:xfrm>
+      </p:grpSpPr>
+      <p:sp>
+        <p:nvSpPr>
+          <p:cNvPr id="2" name="標題 1">
+            <a:extLst>
+              <a:ext uri="{FF2B5EF4-FFF2-40B4-BE49-F238E27FC236}">
+                <a16:creationId xmlns:a16="http://schemas.microsoft.com/office/drawing/2014/main" id="{67A488C1-87DE-4E2A-8EC6-19E31B81A2F8}"/>
+              </a:ext>
+            </a:extLst>
+          </p:cNvPr>
+          <p:cNvSpPr>
+            <a:spLocks noGrp="1"/>
+          </p:cNvSpPr>
+          <p:nvPr>
+            <p:ph type="title"/>
+          </p:nvPr>
+        </p:nvSpPr>
+        <p:spPr/>
+        <p:txBody>
+          <a:bodyPr/>
+          <a:lstStyle/>
+          <a:p>
+            <a:endParaRPr lang="zh-TW" altLang="en-US"/>
+          </a:p>
+        </p:txBody>
+      </p:sp>
+      <p:sp>
+        <p:nvSpPr>
+          <p:cNvPr id="3" name="內容版面配置區 2">
+            <a:extLst>
+              <a:ext uri="{FF2B5EF4-FFF2-40B4-BE49-F238E27FC236}">
+                <a16:creationId xmlns:a16="http://schemas.microsoft.com/office/drawing/2014/main" id="{661C25FC-5F11-4556-9CED-D505F72DCB1A}"/>
+              </a:ext>
+            </a:extLst>
+          </p:cNvPr>
+          <p:cNvSpPr>
+            <a:spLocks noGrp="1"/>
+          </p:cNvSpPr>
+          <p:nvPr>
+            <p:ph idx="1"/>
+          </p:nvPr>
+        </p:nvSpPr>
+        <p:spPr/>
+        <p:txBody>
+          <a:bodyPr/>
+          <a:lstStyle/>
+          <a:p>
+            <a:endParaRPr lang="zh-TW" altLang="en-US"/>
+          </a:p>
+        </p:txBody>
+      </p:sp>
+      <p:pic>
+        <p:nvPicPr>
+          <p:cNvPr id="4" name="圖片 3">
+            <a:extLst>
+              <a:ext uri="{FF2B5EF4-FFF2-40B4-BE49-F238E27FC236}">
+                <a16:creationId xmlns:a16="http://schemas.microsoft.com/office/drawing/2014/main" id="{8F587D8F-0CE2-4175-B212-F097A53FA1B2}"/>
+              </a:ext>
+            </a:extLst>
+          </p:cNvPr>
+          <p:cNvPicPr>
+            <a:picLocks noChangeAspect="1"/>
+          </p:cNvPicPr>
+          <p:nvPr/>
+        </p:nvPicPr>
+        <p:blipFill>
+          <a:blip r:embed="rId2"/>
+          <a:stretch>
+            <a:fillRect/>
+          </a:stretch>
+        </p:blipFill>
+        <p:spPr>
+          <a:xfrm>
+            <a:off x="0" y="570011"/>
+            <a:ext cx="12192000" cy="5717978"/>
+          </a:xfrm>
+          <a:prstGeom prst="rect">
+            <a:avLst/>
+          </a:prstGeom>
+        </p:spPr>
+      </p:pic>
+    </p:spTree>
+    <p:extLst>
+      <p:ext uri="{BB962C8B-B14F-4D97-AF65-F5344CB8AC3E}">
+        <p14:creationId xmlns:p14="http://schemas.microsoft.com/office/powerpoint/2010/main" val="2966658912"/>
       </p:ext>
     </p:extLst>
   </p:cSld>
@@ -4039,7 +5124,7 @@
           <p:cNvPr id="2" name="標題 1">
             <a:extLst>
               <a:ext uri="{FF2B5EF4-FFF2-40B4-BE49-F238E27FC236}">
-                <a16:creationId xmlns:a16="http://schemas.microsoft.com/office/drawing/2014/main" id="{E91D5D0C-82CE-436F-BFD6-9646E0EDD5A1}"/>
+                <a16:creationId xmlns:a16="http://schemas.microsoft.com/office/drawing/2014/main" id="{A91AA2B3-1A83-4C27-9008-7F1AD6B1A296}"/>
               </a:ext>
             </a:extLst>
           </p:cNvPr>
@@ -4052,58 +5137,57 @@
         </p:nvSpPr>
         <p:spPr>
           <a:xfrm>
-            <a:off x="728134" y="0"/>
+            <a:off x="838200" y="4261378"/>
             <a:ext cx="10515600" cy="1325563"/>
           </a:xfrm>
         </p:spPr>
         <p:txBody>
-          <a:bodyPr>
-            <a:normAutofit/>
-          </a:bodyPr>
+          <a:bodyPr/>
           <a:lstStyle/>
           <a:p>
             <a:r>
-              <a:rPr lang="zh-TW" altLang="en-US" sz="3200" dirty="0"/>
-              <a:t>選擇 </a:t>
-            </a:r>
-            <a:r>
-              <a:rPr lang="en-US" altLang="zh-TW" sz="3200" dirty="0"/>
-              <a:t>[</a:t>
-            </a:r>
-            <a:r>
-              <a:rPr lang="zh-TW" altLang="en-US" sz="3200" dirty="0"/>
-              <a:t>會議日期</a:t>
-            </a:r>
-            <a:r>
-              <a:rPr lang="en-US" altLang="zh-TW" sz="3200" dirty="0"/>
-              <a:t>]</a:t>
-            </a:r>
-            <a:r>
-              <a:rPr lang="zh-TW" altLang="en-US" sz="3200" dirty="0"/>
-              <a:t> 後點選 </a:t>
-            </a:r>
-            <a:r>
-              <a:rPr lang="en-US" altLang="zh-TW" sz="3200" dirty="0"/>
-              <a:t>[</a:t>
-            </a:r>
-            <a:r>
-              <a:rPr lang="zh-TW" altLang="en-US" sz="3200" dirty="0"/>
-              <a:t>前往</a:t>
-            </a:r>
-            <a:r>
-              <a:rPr lang="en-US" altLang="zh-TW" sz="3200" dirty="0"/>
-              <a:t>]</a:t>
-            </a:r>
-            <a:endParaRPr lang="zh-TW" altLang="en-US" sz="3200" dirty="0"/>
-          </a:p>
-        </p:txBody>
-      </p:sp>
+              <a:rPr lang="zh-TW" altLang="en-US" b="1" dirty="0"/>
+              <a:t>個人報告上傳</a:t>
+            </a:r>
+          </a:p>
+        </p:txBody>
+      </p:sp>
+    </p:spTree>
+    <p:extLst>
+      <p:ext uri="{BB962C8B-B14F-4D97-AF65-F5344CB8AC3E}">
+        <p14:creationId xmlns:p14="http://schemas.microsoft.com/office/powerpoint/2010/main" val="4063823071"/>
+      </p:ext>
+    </p:extLst>
+  </p:cSld>
+  <p:clrMapOvr>
+    <a:masterClrMapping/>
+  </p:clrMapOvr>
+</p:sld>
+</file>
+
+<file path=ppt/slides/slide20.xml><?xml version="1.0" encoding="utf-8"?>
+<p:sld xmlns:a="http://schemas.openxmlformats.org/drawingml/2006/main" xmlns:r="http://schemas.openxmlformats.org/officeDocument/2006/relationships" xmlns:p="http://schemas.openxmlformats.org/presentationml/2006/main">
+  <p:cSld>
+    <p:spTree>
+      <p:nvGrpSpPr>
+        <p:cNvPr id="1" name=""/>
+        <p:cNvGrpSpPr/>
+        <p:nvPr/>
+      </p:nvGrpSpPr>
+      <p:grpSpPr>
+        <a:xfrm>
+          <a:off x="0" y="0"/>
+          <a:ext cx="0" cy="0"/>
+          <a:chOff x="0" y="0"/>
+          <a:chExt cx="0" cy="0"/>
+        </a:xfrm>
+      </p:grpSpPr>
       <p:pic>
         <p:nvPicPr>
           <p:cNvPr id="4" name="圖片 3">
             <a:extLst>
               <a:ext uri="{FF2B5EF4-FFF2-40B4-BE49-F238E27FC236}">
-                <a16:creationId xmlns:a16="http://schemas.microsoft.com/office/drawing/2014/main" id="{37C59DB8-9D26-4BBC-80DD-604960D9A80E}"/>
+                <a16:creationId xmlns:a16="http://schemas.microsoft.com/office/drawing/2014/main" id="{E461586F-B449-43AF-94B8-932C28D7F12A}"/>
               </a:ext>
             </a:extLst>
           </p:cNvPr>
@@ -4120,8 +5204,8 @@
         </p:blipFill>
         <p:spPr>
           <a:xfrm>
-            <a:off x="821266" y="964269"/>
-            <a:ext cx="9584267" cy="5675962"/>
+            <a:off x="804332" y="962925"/>
+            <a:ext cx="9895409" cy="5310875"/>
           </a:xfrm>
           <a:prstGeom prst="rect">
             <a:avLst/>
@@ -4130,10 +5214,65 @@
       </p:pic>
       <p:sp>
         <p:nvSpPr>
-          <p:cNvPr id="5" name="矩形 4">
-            <a:extLst>
-              <a:ext uri="{FF2B5EF4-FFF2-40B4-BE49-F238E27FC236}">
-                <a16:creationId xmlns:a16="http://schemas.microsoft.com/office/drawing/2014/main" id="{E0726924-D046-4A61-950D-BFACDA8FE401}"/>
+          <p:cNvPr id="5" name="標題 1">
+            <a:extLst>
+              <a:ext uri="{FF2B5EF4-FFF2-40B4-BE49-F238E27FC236}">
+                <a16:creationId xmlns:a16="http://schemas.microsoft.com/office/drawing/2014/main" id="{637DED57-B5B6-47B7-AF15-57A4EAE599A3}"/>
+              </a:ext>
+            </a:extLst>
+          </p:cNvPr>
+          <p:cNvSpPr txBox="1">
+            <a:spLocks/>
+          </p:cNvSpPr>
+          <p:nvPr/>
+        </p:nvSpPr>
+        <p:spPr>
+          <a:xfrm>
+            <a:off x="728134" y="0"/>
+            <a:ext cx="10515600" cy="1325563"/>
+          </a:xfrm>
+          <a:prstGeom prst="rect">
+            <a:avLst/>
+          </a:prstGeom>
+        </p:spPr>
+        <p:txBody>
+          <a:bodyPr vert="horz" lIns="91440" tIns="45720" rIns="91440" bIns="45720" rtlCol="0" anchor="ctr">
+            <a:normAutofit/>
+          </a:bodyPr>
+          <a:lstStyle>
+            <a:lvl1pPr algn="l" defTabSz="914400" rtl="0" eaLnBrk="1" latinLnBrk="0" hangingPunct="1">
+              <a:lnSpc>
+                <a:spcPct val="90000"/>
+              </a:lnSpc>
+              <a:spcBef>
+                <a:spcPct val="0"/>
+              </a:spcBef>
+              <a:buNone/>
+              <a:defRPr sz="4400" kern="1200">
+                <a:solidFill>
+                  <a:schemeClr val="tx1"/>
+                </a:solidFill>
+                <a:latin typeface="+mj-lt"/>
+                <a:ea typeface="+mj-ea"/>
+                <a:cs typeface="+mj-cs"/>
+              </a:defRPr>
+            </a:lvl1pPr>
+          </a:lstStyle>
+          <a:p>
+            <a:r>
+              <a:rPr lang="zh-TW" altLang="en-US" sz="3200" dirty="0"/>
+              <a:t>點選 個別的專案，撰寫專案整體進度</a:t>
+            </a:r>
+            <a:endParaRPr lang="en-US" altLang="zh-TW" sz="3200" dirty="0"/>
+          </a:p>
+        </p:txBody>
+      </p:sp>
+      <p:sp>
+        <p:nvSpPr>
+          <p:cNvPr id="6" name="矩形 5">
+            <a:extLst>
+              <a:ext uri="{FF2B5EF4-FFF2-40B4-BE49-F238E27FC236}">
+                <a16:creationId xmlns:a16="http://schemas.microsoft.com/office/drawing/2014/main" id="{2E621A24-1E0A-45B2-883D-99977B828628}"/>
               </a:ext>
             </a:extLst>
           </p:cNvPr>
@@ -4142,8 +5281,8 @@
         </p:nvSpPr>
         <p:spPr>
           <a:xfrm>
-            <a:off x="4343400" y="5130800"/>
-            <a:ext cx="3064933" cy="397933"/>
+            <a:off x="4108093" y="2288488"/>
+            <a:ext cx="3046239" cy="1792445"/>
           </a:xfrm>
           <a:prstGeom prst="rect">
             <a:avLst/>
@@ -4183,7 +5322,1656 @@
     </p:spTree>
     <p:extLst>
       <p:ext uri="{BB962C8B-B14F-4D97-AF65-F5344CB8AC3E}">
-        <p14:creationId xmlns:p14="http://schemas.microsoft.com/office/powerpoint/2010/main" val="860834749"/>
+        <p14:creationId xmlns:p14="http://schemas.microsoft.com/office/powerpoint/2010/main" val="847413709"/>
+      </p:ext>
+    </p:extLst>
+  </p:cSld>
+  <p:clrMapOvr>
+    <a:masterClrMapping/>
+  </p:clrMapOvr>
+</p:sld>
+</file>
+
+<file path=ppt/slides/slide21.xml><?xml version="1.0" encoding="utf-8"?>
+<p:sld xmlns:a="http://schemas.openxmlformats.org/drawingml/2006/main" xmlns:r="http://schemas.openxmlformats.org/officeDocument/2006/relationships" xmlns:p="http://schemas.openxmlformats.org/presentationml/2006/main">
+  <p:cSld>
+    <p:spTree>
+      <p:nvGrpSpPr>
+        <p:cNvPr id="1" name=""/>
+        <p:cNvGrpSpPr/>
+        <p:nvPr/>
+      </p:nvGrpSpPr>
+      <p:grpSpPr>
+        <a:xfrm>
+          <a:off x="0" y="0"/>
+          <a:ext cx="0" cy="0"/>
+          <a:chOff x="0" y="0"/>
+          <a:chExt cx="0" cy="0"/>
+        </a:xfrm>
+      </p:grpSpPr>
+      <p:pic>
+        <p:nvPicPr>
+          <p:cNvPr id="2" name="圖片 1">
+            <a:extLst>
+              <a:ext uri="{FF2B5EF4-FFF2-40B4-BE49-F238E27FC236}">
+                <a16:creationId xmlns:a16="http://schemas.microsoft.com/office/drawing/2014/main" id="{BCEF26AF-6AA7-4D90-9A90-FC616B78576E}"/>
+              </a:ext>
+            </a:extLst>
+          </p:cNvPr>
+          <p:cNvPicPr>
+            <a:picLocks noChangeAspect="1"/>
+          </p:cNvPicPr>
+          <p:nvPr/>
+        </p:nvPicPr>
+        <p:blipFill>
+          <a:blip r:embed="rId2"/>
+          <a:stretch>
+            <a:fillRect/>
+          </a:stretch>
+        </p:blipFill>
+        <p:spPr>
+          <a:xfrm>
+            <a:off x="544741" y="1325563"/>
+            <a:ext cx="10919125" cy="4677127"/>
+          </a:xfrm>
+          <a:prstGeom prst="rect">
+            <a:avLst/>
+          </a:prstGeom>
+        </p:spPr>
+      </p:pic>
+      <p:sp>
+        <p:nvSpPr>
+          <p:cNvPr id="5" name="標題 1">
+            <a:extLst>
+              <a:ext uri="{FF2B5EF4-FFF2-40B4-BE49-F238E27FC236}">
+                <a16:creationId xmlns:a16="http://schemas.microsoft.com/office/drawing/2014/main" id="{637DED57-B5B6-47B7-AF15-57A4EAE599A3}"/>
+              </a:ext>
+            </a:extLst>
+          </p:cNvPr>
+          <p:cNvSpPr txBox="1">
+            <a:spLocks/>
+          </p:cNvSpPr>
+          <p:nvPr/>
+        </p:nvSpPr>
+        <p:spPr>
+          <a:xfrm>
+            <a:off x="728134" y="0"/>
+            <a:ext cx="10515600" cy="1325563"/>
+          </a:xfrm>
+          <a:prstGeom prst="rect">
+            <a:avLst/>
+          </a:prstGeom>
+        </p:spPr>
+        <p:txBody>
+          <a:bodyPr vert="horz" lIns="91440" tIns="45720" rIns="91440" bIns="45720" rtlCol="0" anchor="ctr">
+            <a:normAutofit/>
+          </a:bodyPr>
+          <a:lstStyle>
+            <a:lvl1pPr algn="l" defTabSz="914400" rtl="0" eaLnBrk="1" latinLnBrk="0" hangingPunct="1">
+              <a:lnSpc>
+                <a:spcPct val="90000"/>
+              </a:lnSpc>
+              <a:spcBef>
+                <a:spcPct val="0"/>
+              </a:spcBef>
+              <a:buNone/>
+              <a:defRPr sz="4400" kern="1200">
+                <a:solidFill>
+                  <a:schemeClr val="tx1"/>
+                </a:solidFill>
+                <a:latin typeface="+mj-lt"/>
+                <a:ea typeface="+mj-ea"/>
+                <a:cs typeface="+mj-cs"/>
+              </a:defRPr>
+            </a:lvl1pPr>
+          </a:lstStyle>
+          <a:p>
+            <a:r>
+              <a:rPr lang="zh-TW" altLang="en-US" sz="3200" dirty="0"/>
+              <a:t>在專案進度的項目中，點選 </a:t>
+            </a:r>
+            <a:r>
+              <a:rPr lang="en-US" altLang="zh-TW" sz="3200" dirty="0"/>
+              <a:t>[</a:t>
+            </a:r>
+            <a:r>
+              <a:rPr lang="zh-TW" altLang="en-US" sz="3200" dirty="0"/>
+              <a:t>編輯內容</a:t>
+            </a:r>
+            <a:r>
+              <a:rPr lang="en-US" altLang="zh-TW" sz="3200" dirty="0"/>
+              <a:t>]</a:t>
+            </a:r>
+          </a:p>
+        </p:txBody>
+      </p:sp>
+      <p:sp>
+        <p:nvSpPr>
+          <p:cNvPr id="7" name="箭號: 向下 6">
+            <a:extLst>
+              <a:ext uri="{FF2B5EF4-FFF2-40B4-BE49-F238E27FC236}">
+                <a16:creationId xmlns:a16="http://schemas.microsoft.com/office/drawing/2014/main" id="{64AFED10-4282-41A2-94A2-B5CD98AA697F}"/>
+              </a:ext>
+            </a:extLst>
+          </p:cNvPr>
+          <p:cNvSpPr/>
+          <p:nvPr/>
+        </p:nvSpPr>
+        <p:spPr>
+          <a:xfrm>
+            <a:off x="10469033" y="2573866"/>
+            <a:ext cx="330200" cy="372533"/>
+          </a:xfrm>
+          <a:prstGeom prst="downArrow">
+            <a:avLst/>
+          </a:prstGeom>
+          <a:solidFill>
+            <a:srgbClr val="FF0000"/>
+          </a:solidFill>
+          <a:ln>
+            <a:solidFill>
+              <a:srgbClr val="FF0000"/>
+            </a:solidFill>
+          </a:ln>
+        </p:spPr>
+        <p:style>
+          <a:lnRef idx="2">
+            <a:schemeClr val="accent1">
+              <a:shade val="50000"/>
+            </a:schemeClr>
+          </a:lnRef>
+          <a:fillRef idx="1">
+            <a:schemeClr val="accent1"/>
+          </a:fillRef>
+          <a:effectRef idx="0">
+            <a:schemeClr val="accent1"/>
+          </a:effectRef>
+          <a:fontRef idx="minor">
+            <a:schemeClr val="lt1"/>
+          </a:fontRef>
+        </p:style>
+        <p:txBody>
+          <a:bodyPr rtlCol="0" anchor="ctr"/>
+          <a:lstStyle/>
+          <a:p>
+            <a:pPr algn="ctr"/>
+            <a:endParaRPr lang="zh-TW" altLang="en-US"/>
+          </a:p>
+        </p:txBody>
+      </p:sp>
+    </p:spTree>
+    <p:extLst>
+      <p:ext uri="{BB962C8B-B14F-4D97-AF65-F5344CB8AC3E}">
+        <p14:creationId xmlns:p14="http://schemas.microsoft.com/office/powerpoint/2010/main" val="283312575"/>
+      </p:ext>
+    </p:extLst>
+  </p:cSld>
+  <p:clrMapOvr>
+    <a:masterClrMapping/>
+  </p:clrMapOvr>
+</p:sld>
+</file>
+
+<file path=ppt/slides/slide22.xml><?xml version="1.0" encoding="utf-8"?>
+<p:sld xmlns:a="http://schemas.openxmlformats.org/drawingml/2006/main" xmlns:r="http://schemas.openxmlformats.org/officeDocument/2006/relationships" xmlns:p="http://schemas.openxmlformats.org/presentationml/2006/main">
+  <p:cSld>
+    <p:spTree>
+      <p:nvGrpSpPr>
+        <p:cNvPr id="1" name=""/>
+        <p:cNvGrpSpPr/>
+        <p:nvPr/>
+      </p:nvGrpSpPr>
+      <p:grpSpPr>
+        <a:xfrm>
+          <a:off x="0" y="0"/>
+          <a:ext cx="0" cy="0"/>
+          <a:chOff x="0" y="0"/>
+          <a:chExt cx="0" cy="0"/>
+        </a:xfrm>
+      </p:grpSpPr>
+      <p:sp>
+        <p:nvSpPr>
+          <p:cNvPr id="5" name="矩形 4">
+            <a:extLst>
+              <a:ext uri="{FF2B5EF4-FFF2-40B4-BE49-F238E27FC236}">
+                <a16:creationId xmlns:a16="http://schemas.microsoft.com/office/drawing/2014/main" id="{27E6FEAD-BD3F-41DC-8656-D04002624E22}"/>
+              </a:ext>
+            </a:extLst>
+          </p:cNvPr>
+          <p:cNvSpPr/>
+          <p:nvPr/>
+        </p:nvSpPr>
+        <p:spPr>
+          <a:xfrm>
+            <a:off x="2637366" y="728988"/>
+            <a:ext cx="6917267" cy="4324261"/>
+          </a:xfrm>
+          <a:prstGeom prst="rect">
+            <a:avLst/>
+          </a:prstGeom>
+          <a:solidFill>
+            <a:schemeClr val="accent1">
+              <a:lumMod val="20000"/>
+              <a:lumOff val="80000"/>
+            </a:schemeClr>
+          </a:solidFill>
+        </p:spPr>
+        <p:txBody>
+          <a:bodyPr wrap="square">
+            <a:spAutoFit/>
+          </a:bodyPr>
+          <a:lstStyle/>
+          <a:p>
+            <a:r>
+              <a:rPr lang="en-US" altLang="zh-TW" sz="1100" dirty="0"/>
+              <a:t>### </a:t>
+            </a:r>
+            <a:r>
+              <a:rPr lang="zh-TW" altLang="en-US" sz="1100" dirty="0"/>
+              <a:t>🌐 </a:t>
+            </a:r>
+            <a:r>
+              <a:rPr lang="en-US" altLang="zh-TW" sz="1100" dirty="0" err="1"/>
+              <a:t>DeviceOn</a:t>
+            </a:r>
+            <a:endParaRPr lang="en-US" altLang="zh-TW" sz="1100" dirty="0"/>
+          </a:p>
+          <a:p>
+            <a:r>
+              <a:rPr lang="en-US" altLang="zh-TW" sz="1100" dirty="0"/>
+              <a:t>* **Owner**</a:t>
+            </a:r>
+            <a:r>
+              <a:rPr lang="zh-TW" altLang="en-US" sz="1100" dirty="0"/>
+              <a:t>：</a:t>
+            </a:r>
+            <a:r>
+              <a:rPr lang="en-US" altLang="zh-TW" sz="1100" dirty="0"/>
+              <a:t>[</a:t>
+            </a:r>
+            <a:r>
+              <a:rPr lang="zh-TW" altLang="en-US" sz="1100" dirty="0"/>
+              <a:t>姓名</a:t>
+            </a:r>
+            <a:r>
+              <a:rPr lang="en-US" altLang="zh-TW" sz="1100" dirty="0"/>
+              <a:t>]</a:t>
+            </a:r>
+          </a:p>
+          <a:p>
+            <a:endParaRPr lang="en-US" altLang="zh-TW" sz="1100" dirty="0"/>
+          </a:p>
+          <a:p>
+            <a:r>
+              <a:rPr lang="en-US" altLang="zh-TW" sz="1100" dirty="0"/>
+              <a:t>#### </a:t>
+            </a:r>
+            <a:r>
+              <a:rPr lang="zh-TW" altLang="en-US" sz="1100" dirty="0"/>
+              <a:t>📦 </a:t>
+            </a:r>
+            <a:r>
+              <a:rPr lang="en-US" altLang="zh-TW" sz="1100" dirty="0"/>
+              <a:t>[</a:t>
+            </a:r>
+            <a:r>
+              <a:rPr lang="zh-TW" altLang="en-US" sz="1100" dirty="0"/>
+              <a:t>子項目名稱</a:t>
+            </a:r>
+            <a:r>
+              <a:rPr lang="en-US" altLang="zh-TW" sz="1100" dirty="0"/>
+              <a:t>]</a:t>
+            </a:r>
+          </a:p>
+          <a:p>
+            <a:r>
+              <a:rPr lang="en-US" altLang="zh-TW" sz="1100" dirty="0"/>
+              <a:t>* **</a:t>
+            </a:r>
+            <a:r>
+              <a:rPr lang="zh-TW" altLang="en-US" sz="1100" dirty="0"/>
+              <a:t>階段**：</a:t>
+            </a:r>
+            <a:r>
+              <a:rPr lang="en-US" altLang="zh-TW" sz="1100" dirty="0"/>
+              <a:t>[</a:t>
+            </a:r>
+            <a:r>
+              <a:rPr lang="zh-TW" altLang="en-US" sz="1100" dirty="0"/>
+              <a:t>目前所處階段</a:t>
+            </a:r>
+            <a:r>
+              <a:rPr lang="en-US" altLang="zh-TW" sz="1100" dirty="0"/>
+              <a:t>]</a:t>
+            </a:r>
+          </a:p>
+          <a:p>
+            <a:r>
+              <a:rPr lang="en-US" altLang="zh-TW" sz="1100" dirty="0"/>
+              <a:t>* **</a:t>
+            </a:r>
+            <a:r>
+              <a:rPr lang="zh-TW" altLang="en-US" sz="1100" dirty="0"/>
+              <a:t>本週進度**：</a:t>
+            </a:r>
+          </a:p>
+          <a:p>
+            <a:r>
+              <a:rPr lang="zh-TW" altLang="en-US" sz="1100" dirty="0"/>
+              <a:t>  * 🎉 </a:t>
+            </a:r>
+            <a:r>
+              <a:rPr lang="en-US" altLang="zh-TW" sz="1100" dirty="0"/>
+              <a:t>[NEW DONE] [</a:t>
+            </a:r>
+            <a:r>
+              <a:rPr lang="zh-TW" altLang="en-US" sz="1100" dirty="0"/>
+              <a:t>本週全新完成的項目</a:t>
+            </a:r>
+            <a:r>
+              <a:rPr lang="en-US" altLang="zh-TW" sz="1100" dirty="0"/>
+              <a:t>]</a:t>
+            </a:r>
+          </a:p>
+          <a:p>
+            <a:r>
+              <a:rPr lang="en-US" altLang="zh-TW" sz="1100" dirty="0"/>
+              <a:t>  * ✅ [DONE] [</a:t>
+            </a:r>
+            <a:r>
+              <a:rPr lang="zh-TW" altLang="en-US" sz="1100" dirty="0"/>
+              <a:t>之前就已完成的背景資訊</a:t>
+            </a:r>
+            <a:r>
+              <a:rPr lang="en-US" altLang="zh-TW" sz="1100" dirty="0"/>
+              <a:t>]</a:t>
+            </a:r>
+          </a:p>
+          <a:p>
+            <a:r>
+              <a:rPr lang="en-US" altLang="zh-TW" sz="1100" dirty="0"/>
+              <a:t>  * ⏳ [WIP] [</a:t>
+            </a:r>
+            <a:r>
+              <a:rPr lang="zh-TW" altLang="en-US" sz="1100" dirty="0"/>
+              <a:t>正常進行中的項目</a:t>
+            </a:r>
+            <a:r>
+              <a:rPr lang="en-US" altLang="zh-TW" sz="1100" dirty="0"/>
+              <a:t>]</a:t>
+            </a:r>
+          </a:p>
+          <a:p>
+            <a:endParaRPr lang="en-US" altLang="zh-TW" sz="1100" dirty="0"/>
+          </a:p>
+          <a:p>
+            <a:r>
+              <a:rPr lang="en-US" altLang="zh-TW" sz="1100" dirty="0"/>
+              <a:t>---</a:t>
+            </a:r>
+          </a:p>
+          <a:p>
+            <a:r>
+              <a:rPr lang="en-US" altLang="zh-TW" sz="1100" dirty="0"/>
+              <a:t>* **⚠️ </a:t>
+            </a:r>
+            <a:r>
+              <a:rPr lang="zh-TW" altLang="en-US" sz="1100" dirty="0"/>
+              <a:t>風險與阻礙**：無</a:t>
+            </a:r>
+          </a:p>
+          <a:p>
+            <a:r>
+              <a:rPr lang="zh-TW" altLang="en-US" sz="1100" dirty="0"/>
+              <a:t>* **💡 需要的決策或協助**：無</a:t>
+            </a:r>
+          </a:p>
+          <a:p>
+            <a:endParaRPr lang="zh-TW" altLang="en-US" sz="1100" dirty="0"/>
+          </a:p>
+          <a:p>
+            <a:r>
+              <a:rPr lang="en-US" altLang="zh-TW" sz="1100" dirty="0"/>
+              <a:t>&lt;!--</a:t>
+            </a:r>
+          </a:p>
+          <a:p>
+            <a:r>
+              <a:rPr lang="en-US" altLang="zh-TW" sz="1100" dirty="0"/>
+              <a:t>| </a:t>
+            </a:r>
+            <a:r>
+              <a:rPr lang="zh-TW" altLang="en-US" sz="1100" dirty="0"/>
+              <a:t>標籤語法 </a:t>
+            </a:r>
+            <a:r>
+              <a:rPr lang="en-US" altLang="zh-TW" sz="1100" dirty="0"/>
+              <a:t>| </a:t>
+            </a:r>
+            <a:r>
+              <a:rPr lang="zh-TW" altLang="en-US" sz="1100" dirty="0"/>
+              <a:t>語意說明 </a:t>
+            </a:r>
+            <a:r>
+              <a:rPr lang="en-US" altLang="zh-TW" sz="1100" dirty="0"/>
+              <a:t>| AI </a:t>
+            </a:r>
+            <a:r>
+              <a:rPr lang="zh-TW" altLang="en-US" sz="1100" dirty="0"/>
+              <a:t>生成 </a:t>
+            </a:r>
+            <a:r>
+              <a:rPr lang="en-US" altLang="zh-TW" sz="1100" dirty="0"/>
+              <a:t>HTML </a:t>
+            </a:r>
+            <a:r>
+              <a:rPr lang="zh-TW" altLang="en-US" sz="1100" dirty="0"/>
+              <a:t>時的渲染效果建議 </a:t>
+            </a:r>
+            <a:r>
+              <a:rPr lang="en-US" altLang="zh-TW" sz="1100" dirty="0"/>
+              <a:t>|</a:t>
+            </a:r>
+          </a:p>
+          <a:p>
+            <a:r>
+              <a:rPr lang="en-US" altLang="zh-TW" sz="1100" dirty="0"/>
+              <a:t>| --------| ------- | ---------------------------- |</a:t>
+            </a:r>
+          </a:p>
+          <a:p>
+            <a:r>
+              <a:rPr lang="en-US" altLang="zh-TW" sz="1100" dirty="0"/>
+              <a:t>| `</a:t>
+            </a:r>
+            <a:r>
+              <a:rPr lang="zh-TW" altLang="en-US" sz="1100" dirty="0"/>
+              <a:t>🎉 </a:t>
+            </a:r>
+            <a:r>
+              <a:rPr lang="en-US" altLang="zh-TW" sz="1100" dirty="0"/>
+              <a:t>[NEW DONE]` | **</a:t>
+            </a:r>
+            <a:r>
+              <a:rPr lang="zh-TW" altLang="en-US" sz="1100" dirty="0"/>
+              <a:t>本週全新完成** </a:t>
+            </a:r>
+            <a:r>
+              <a:rPr lang="en-US" altLang="zh-TW" sz="1100" dirty="0"/>
+              <a:t>| </a:t>
+            </a:r>
+            <a:r>
+              <a:rPr lang="zh-TW" altLang="en-US" sz="1100" dirty="0"/>
+              <a:t>亮綠色卡片 </a:t>
+            </a:r>
+            <a:r>
+              <a:rPr lang="en-US" altLang="zh-TW" sz="1100" dirty="0"/>
+              <a:t>/ </a:t>
+            </a:r>
+            <a:r>
+              <a:rPr lang="zh-TW" altLang="en-US" sz="1100" dirty="0"/>
+              <a:t>發光綠色 </a:t>
+            </a:r>
+            <a:r>
+              <a:rPr lang="en-US" altLang="zh-TW" sz="1100" dirty="0"/>
+              <a:t>Badge |</a:t>
+            </a:r>
+          </a:p>
+          <a:p>
+            <a:r>
+              <a:rPr lang="en-US" altLang="zh-TW" sz="1100" dirty="0"/>
+              <a:t>| `✅ [DONE]` | </a:t>
+            </a:r>
+            <a:r>
+              <a:rPr lang="zh-TW" altLang="en-US" sz="1100" dirty="0"/>
+              <a:t>之前就已完成（背景資訊） </a:t>
+            </a:r>
+            <a:r>
+              <a:rPr lang="en-US" altLang="zh-TW" sz="1100" dirty="0"/>
+              <a:t>| </a:t>
+            </a:r>
+            <a:r>
+              <a:rPr lang="zh-TW" altLang="en-US" sz="1100" dirty="0"/>
+              <a:t>灰綠色低調標籤 </a:t>
+            </a:r>
+            <a:r>
+              <a:rPr lang="en-US" altLang="zh-TW" sz="1100" dirty="0"/>
+              <a:t>|</a:t>
+            </a:r>
+          </a:p>
+          <a:p>
+            <a:r>
+              <a:rPr lang="en-US" altLang="zh-TW" sz="1100" dirty="0"/>
+              <a:t>| `⚡ [UPDATED]` | **</a:t>
+            </a:r>
+            <a:r>
+              <a:rPr lang="zh-TW" altLang="en-US" sz="1100" dirty="0"/>
+              <a:t>本週有重要進展</a:t>
+            </a:r>
+            <a:r>
+              <a:rPr lang="en-US" altLang="zh-TW" sz="1100" dirty="0"/>
+              <a:t>/</a:t>
+            </a:r>
+            <a:r>
+              <a:rPr lang="zh-TW" altLang="en-US" sz="1100" dirty="0"/>
+              <a:t>狀態變更** </a:t>
+            </a:r>
+            <a:r>
+              <a:rPr lang="en-US" altLang="zh-TW" sz="1100" dirty="0"/>
+              <a:t>| </a:t>
+            </a:r>
+            <a:r>
+              <a:rPr lang="zh-TW" altLang="en-US" sz="1100" dirty="0"/>
+              <a:t>藍色 </a:t>
+            </a:r>
+            <a:r>
+              <a:rPr lang="en-US" altLang="zh-TW" sz="1100" dirty="0"/>
+              <a:t>/ </a:t>
+            </a:r>
+            <a:r>
+              <a:rPr lang="zh-TW" altLang="en-US" sz="1100" dirty="0"/>
+              <a:t>紫色高亮標籤 </a:t>
+            </a:r>
+            <a:r>
+              <a:rPr lang="en-US" altLang="zh-TW" sz="1100" dirty="0"/>
+              <a:t>|</a:t>
+            </a:r>
+          </a:p>
+          <a:p>
+            <a:r>
+              <a:rPr lang="en-US" altLang="zh-TW" sz="1100" dirty="0"/>
+              <a:t>| `</a:t>
+            </a:r>
+            <a:r>
+              <a:rPr lang="zh-TW" altLang="en-US" sz="1100" dirty="0"/>
+              <a:t>🆕 </a:t>
+            </a:r>
+            <a:r>
+              <a:rPr lang="en-US" altLang="zh-TW" sz="1100" dirty="0"/>
+              <a:t>[NEW]` | </a:t>
+            </a:r>
+            <a:r>
+              <a:rPr lang="zh-TW" altLang="en-US" sz="1100" dirty="0"/>
+              <a:t>本週新提出</a:t>
+            </a:r>
+            <a:r>
+              <a:rPr lang="en-US" altLang="zh-TW" sz="1100" dirty="0"/>
+              <a:t>/</a:t>
+            </a:r>
+            <a:r>
+              <a:rPr lang="zh-TW" altLang="en-US" sz="1100" dirty="0"/>
+              <a:t>新增的項目 </a:t>
+            </a:r>
+            <a:r>
+              <a:rPr lang="en-US" altLang="zh-TW" sz="1100" dirty="0"/>
+              <a:t>| </a:t>
+            </a:r>
+            <a:r>
+              <a:rPr lang="zh-TW" altLang="en-US" sz="1100" dirty="0"/>
+              <a:t>亮黃色 </a:t>
+            </a:r>
+            <a:r>
+              <a:rPr lang="en-US" altLang="zh-TW" sz="1100" dirty="0"/>
+              <a:t>`NEW` </a:t>
+            </a:r>
+            <a:r>
+              <a:rPr lang="zh-TW" altLang="en-US" sz="1100" dirty="0"/>
+              <a:t>動態標籤 </a:t>
+            </a:r>
+            <a:r>
+              <a:rPr lang="en-US" altLang="zh-TW" sz="1100" dirty="0"/>
+              <a:t>|</a:t>
+            </a:r>
+          </a:p>
+          <a:p>
+            <a:r>
+              <a:rPr lang="en-US" altLang="zh-TW" sz="1100" dirty="0"/>
+              <a:t>| `⏳ [WIP]` | </a:t>
+            </a:r>
+            <a:r>
+              <a:rPr lang="zh-TW" altLang="en-US" sz="1100" dirty="0"/>
+              <a:t>正常進行中 </a:t>
+            </a:r>
+            <a:r>
+              <a:rPr lang="en-US" altLang="zh-TW" sz="1100" dirty="0"/>
+              <a:t>| </a:t>
+            </a:r>
+            <a:r>
+              <a:rPr lang="zh-TW" altLang="en-US" sz="1100" dirty="0"/>
+              <a:t>預設灰色 </a:t>
+            </a:r>
+            <a:r>
+              <a:rPr lang="en-US" altLang="zh-TW" sz="1100" dirty="0"/>
+              <a:t>/ </a:t>
+            </a:r>
+            <a:r>
+              <a:rPr lang="zh-TW" altLang="en-US" sz="1100" dirty="0"/>
+              <a:t>藍色標籤 </a:t>
+            </a:r>
+            <a:r>
+              <a:rPr lang="en-US" altLang="zh-TW" sz="1100" dirty="0"/>
+              <a:t>|</a:t>
+            </a:r>
+          </a:p>
+          <a:p>
+            <a:r>
+              <a:rPr lang="en-US" altLang="zh-TW" sz="1100" dirty="0"/>
+              <a:t>| `</a:t>
+            </a:r>
+            <a:r>
+              <a:rPr lang="zh-TW" altLang="en-US" sz="1100" dirty="0"/>
+              <a:t>🚫 </a:t>
+            </a:r>
+            <a:r>
+              <a:rPr lang="en-US" altLang="zh-TW" sz="1100" dirty="0"/>
+              <a:t>[BLOCKED]` | </a:t>
+            </a:r>
+            <a:r>
+              <a:rPr lang="zh-TW" altLang="en-US" sz="1100" dirty="0"/>
+              <a:t>卡關 </a:t>
+            </a:r>
+            <a:r>
+              <a:rPr lang="en-US" altLang="zh-TW" sz="1100" dirty="0"/>
+              <a:t>/ </a:t>
+            </a:r>
+            <a:r>
+              <a:rPr lang="zh-TW" altLang="en-US" sz="1100" dirty="0"/>
+              <a:t>需跨團隊協助 </a:t>
+            </a:r>
+            <a:r>
+              <a:rPr lang="en-US" altLang="zh-TW" sz="1100" dirty="0"/>
+              <a:t>| </a:t>
+            </a:r>
+            <a:r>
+              <a:rPr lang="zh-TW" altLang="en-US" sz="1100" dirty="0"/>
+              <a:t>紅色警示邊框 </a:t>
+            </a:r>
+            <a:r>
+              <a:rPr lang="en-US" altLang="zh-TW" sz="1100" dirty="0"/>
+              <a:t>/ </a:t>
+            </a:r>
+            <a:r>
+              <a:rPr lang="zh-TW" altLang="en-US" sz="1100" dirty="0"/>
+              <a:t>紅色 </a:t>
+            </a:r>
+            <a:r>
+              <a:rPr lang="en-US" altLang="zh-TW" sz="1100" dirty="0"/>
+              <a:t>Card |</a:t>
+            </a:r>
+          </a:p>
+          <a:p>
+            <a:r>
+              <a:rPr lang="en-US" altLang="zh-TW" sz="1100" dirty="0"/>
+              <a:t>--&gt;</a:t>
+            </a:r>
+          </a:p>
+          <a:p>
+            <a:endParaRPr lang="en-US" altLang="zh-TW" sz="1100" dirty="0"/>
+          </a:p>
+        </p:txBody>
+      </p:sp>
+      <p:sp>
+        <p:nvSpPr>
+          <p:cNvPr id="6" name="矩形 5">
+            <a:extLst>
+              <a:ext uri="{FF2B5EF4-FFF2-40B4-BE49-F238E27FC236}">
+                <a16:creationId xmlns:a16="http://schemas.microsoft.com/office/drawing/2014/main" id="{508BDD3C-CCA1-4249-9A7E-8CD25AE7C62F}"/>
+              </a:ext>
+            </a:extLst>
+          </p:cNvPr>
+          <p:cNvSpPr/>
+          <p:nvPr/>
+        </p:nvSpPr>
+        <p:spPr>
+          <a:xfrm>
+            <a:off x="3849230" y="120446"/>
+            <a:ext cx="4493538" cy="461665"/>
+          </a:xfrm>
+          <a:prstGeom prst="rect">
+            <a:avLst/>
+          </a:prstGeom>
+        </p:spPr>
+        <p:txBody>
+          <a:bodyPr wrap="none">
+            <a:spAutoFit/>
+          </a:bodyPr>
+          <a:lstStyle/>
+          <a:p>
+            <a:r>
+              <a:rPr lang="zh-TW" altLang="en-US" sz="2400" dirty="0"/>
+              <a:t>請參考下方的範例模板進行填寫</a:t>
+            </a:r>
+          </a:p>
+        </p:txBody>
+      </p:sp>
+    </p:spTree>
+    <p:extLst>
+      <p:ext uri="{BB962C8B-B14F-4D97-AF65-F5344CB8AC3E}">
+        <p14:creationId xmlns:p14="http://schemas.microsoft.com/office/powerpoint/2010/main" val="2147431013"/>
+      </p:ext>
+    </p:extLst>
+  </p:cSld>
+  <p:clrMapOvr>
+    <a:masterClrMapping/>
+  </p:clrMapOvr>
+</p:sld>
+</file>
+
+<file path=ppt/slides/slide23.xml><?xml version="1.0" encoding="utf-8"?>
+<p:sld xmlns:a="http://schemas.openxmlformats.org/drawingml/2006/main" xmlns:r="http://schemas.openxmlformats.org/officeDocument/2006/relationships" xmlns:p="http://schemas.openxmlformats.org/presentationml/2006/main">
+  <p:cSld>
+    <p:spTree>
+      <p:nvGrpSpPr>
+        <p:cNvPr id="1" name=""/>
+        <p:cNvGrpSpPr/>
+        <p:nvPr/>
+      </p:nvGrpSpPr>
+      <p:grpSpPr>
+        <a:xfrm>
+          <a:off x="0" y="0"/>
+          <a:ext cx="0" cy="0"/>
+          <a:chOff x="0" y="0"/>
+          <a:chExt cx="0" cy="0"/>
+        </a:xfrm>
+      </p:grpSpPr>
+      <p:pic>
+        <p:nvPicPr>
+          <p:cNvPr id="3" name="圖片 2">
+            <a:extLst>
+              <a:ext uri="{FF2B5EF4-FFF2-40B4-BE49-F238E27FC236}">
+                <a16:creationId xmlns:a16="http://schemas.microsoft.com/office/drawing/2014/main" id="{6387032E-1092-4E59-AA94-17155ED836FB}"/>
+              </a:ext>
+            </a:extLst>
+          </p:cNvPr>
+          <p:cNvPicPr>
+            <a:picLocks noChangeAspect="1"/>
+          </p:cNvPicPr>
+          <p:nvPr/>
+        </p:nvPicPr>
+        <p:blipFill>
+          <a:blip r:embed="rId2"/>
+          <a:stretch>
+            <a:fillRect/>
+          </a:stretch>
+        </p:blipFill>
+        <p:spPr>
+          <a:xfrm>
+            <a:off x="668867" y="1115410"/>
+            <a:ext cx="9609666" cy="5692642"/>
+          </a:xfrm>
+          <a:prstGeom prst="rect">
+            <a:avLst/>
+          </a:prstGeom>
+        </p:spPr>
+      </p:pic>
+      <p:sp>
+        <p:nvSpPr>
+          <p:cNvPr id="5" name="標題 1">
+            <a:extLst>
+              <a:ext uri="{FF2B5EF4-FFF2-40B4-BE49-F238E27FC236}">
+                <a16:creationId xmlns:a16="http://schemas.microsoft.com/office/drawing/2014/main" id="{637DED57-B5B6-47B7-AF15-57A4EAE599A3}"/>
+              </a:ext>
+            </a:extLst>
+          </p:cNvPr>
+          <p:cNvSpPr txBox="1">
+            <a:spLocks/>
+          </p:cNvSpPr>
+          <p:nvPr/>
+        </p:nvSpPr>
+        <p:spPr>
+          <a:xfrm>
+            <a:off x="728134" y="0"/>
+            <a:ext cx="10515600" cy="1325563"/>
+          </a:xfrm>
+          <a:prstGeom prst="rect">
+            <a:avLst/>
+          </a:prstGeom>
+        </p:spPr>
+        <p:txBody>
+          <a:bodyPr vert="horz" lIns="91440" tIns="45720" rIns="91440" bIns="45720" rtlCol="0" anchor="ctr">
+            <a:normAutofit/>
+          </a:bodyPr>
+          <a:lstStyle>
+            <a:lvl1pPr algn="l" defTabSz="914400" rtl="0" eaLnBrk="1" latinLnBrk="0" hangingPunct="1">
+              <a:lnSpc>
+                <a:spcPct val="90000"/>
+              </a:lnSpc>
+              <a:spcBef>
+                <a:spcPct val="0"/>
+              </a:spcBef>
+              <a:buNone/>
+              <a:defRPr sz="4400" kern="1200">
+                <a:solidFill>
+                  <a:schemeClr val="tx1"/>
+                </a:solidFill>
+                <a:latin typeface="+mj-lt"/>
+                <a:ea typeface="+mj-ea"/>
+                <a:cs typeface="+mj-cs"/>
+              </a:defRPr>
+            </a:lvl1pPr>
+          </a:lstStyle>
+          <a:p>
+            <a:r>
+              <a:rPr lang="zh-TW" altLang="en-US" sz="3200" dirty="0"/>
+              <a:t>請按照模板進行填寫，並點選 </a:t>
+            </a:r>
+            <a:r>
+              <a:rPr lang="en-US" altLang="zh-TW" sz="3200" dirty="0"/>
+              <a:t>[</a:t>
+            </a:r>
+            <a:r>
+              <a:rPr lang="zh-TW" altLang="en-US" sz="3200" dirty="0"/>
+              <a:t>儲存</a:t>
+            </a:r>
+            <a:r>
+              <a:rPr lang="en-US" altLang="zh-TW" sz="3200" dirty="0"/>
+              <a:t>]</a:t>
+            </a:r>
+            <a:r>
+              <a:rPr lang="zh-TW" altLang="en-US" sz="3200" dirty="0"/>
+              <a:t> 與 </a:t>
+            </a:r>
+            <a:r>
+              <a:rPr lang="en-US" altLang="zh-TW" sz="3200" dirty="0"/>
+              <a:t>[</a:t>
+            </a:r>
+            <a:r>
+              <a:rPr lang="zh-TW" altLang="en-US" sz="3200" dirty="0"/>
+              <a:t>產生投影片</a:t>
+            </a:r>
+            <a:r>
+              <a:rPr lang="en-US" altLang="zh-TW" sz="3200" dirty="0"/>
+              <a:t>]</a:t>
+            </a:r>
+          </a:p>
+        </p:txBody>
+      </p:sp>
+      <p:sp>
+        <p:nvSpPr>
+          <p:cNvPr id="7" name="箭號: 向下 6">
+            <a:extLst>
+              <a:ext uri="{FF2B5EF4-FFF2-40B4-BE49-F238E27FC236}">
+                <a16:creationId xmlns:a16="http://schemas.microsoft.com/office/drawing/2014/main" id="{64AFED10-4282-41A2-94A2-B5CD98AA697F}"/>
+              </a:ext>
+            </a:extLst>
+          </p:cNvPr>
+          <p:cNvSpPr/>
+          <p:nvPr/>
+        </p:nvSpPr>
+        <p:spPr>
+          <a:xfrm>
+            <a:off x="9410701" y="1490133"/>
+            <a:ext cx="330200" cy="372533"/>
+          </a:xfrm>
+          <a:prstGeom prst="downArrow">
+            <a:avLst/>
+          </a:prstGeom>
+          <a:solidFill>
+            <a:srgbClr val="FF0000"/>
+          </a:solidFill>
+          <a:ln>
+            <a:solidFill>
+              <a:srgbClr val="FF0000"/>
+            </a:solidFill>
+          </a:ln>
+        </p:spPr>
+        <p:style>
+          <a:lnRef idx="2">
+            <a:schemeClr val="accent1">
+              <a:shade val="50000"/>
+            </a:schemeClr>
+          </a:lnRef>
+          <a:fillRef idx="1">
+            <a:schemeClr val="accent1"/>
+          </a:fillRef>
+          <a:effectRef idx="0">
+            <a:schemeClr val="accent1"/>
+          </a:effectRef>
+          <a:fontRef idx="minor">
+            <a:schemeClr val="lt1"/>
+          </a:fontRef>
+        </p:style>
+        <p:txBody>
+          <a:bodyPr rtlCol="0" anchor="ctr"/>
+          <a:lstStyle/>
+          <a:p>
+            <a:pPr algn="ctr"/>
+            <a:endParaRPr lang="zh-TW" altLang="en-US"/>
+          </a:p>
+        </p:txBody>
+      </p:sp>
+    </p:spTree>
+    <p:extLst>
+      <p:ext uri="{BB962C8B-B14F-4D97-AF65-F5344CB8AC3E}">
+        <p14:creationId xmlns:p14="http://schemas.microsoft.com/office/powerpoint/2010/main" val="2730151916"/>
+      </p:ext>
+    </p:extLst>
+  </p:cSld>
+  <p:clrMapOvr>
+    <a:masterClrMapping/>
+  </p:clrMapOvr>
+</p:sld>
+</file>
+
+<file path=ppt/slides/slide24.xml><?xml version="1.0" encoding="utf-8"?>
+<p:sld xmlns:a="http://schemas.openxmlformats.org/drawingml/2006/main" xmlns:r="http://schemas.openxmlformats.org/officeDocument/2006/relationships" xmlns:p="http://schemas.openxmlformats.org/presentationml/2006/main">
+  <p:cSld>
+    <p:spTree>
+      <p:nvGrpSpPr>
+        <p:cNvPr id="1" name=""/>
+        <p:cNvGrpSpPr/>
+        <p:nvPr/>
+      </p:nvGrpSpPr>
+      <p:grpSpPr>
+        <a:xfrm>
+          <a:off x="0" y="0"/>
+          <a:ext cx="0" cy="0"/>
+          <a:chOff x="0" y="0"/>
+          <a:chExt cx="0" cy="0"/>
+        </a:xfrm>
+      </p:grpSpPr>
+      <p:sp>
+        <p:nvSpPr>
+          <p:cNvPr id="2" name="標題 1">
+            <a:extLst>
+              <a:ext uri="{FF2B5EF4-FFF2-40B4-BE49-F238E27FC236}">
+                <a16:creationId xmlns:a16="http://schemas.microsoft.com/office/drawing/2014/main" id="{657D5B50-8D5A-4467-A424-5479240A4D33}"/>
+              </a:ext>
+            </a:extLst>
+          </p:cNvPr>
+          <p:cNvSpPr>
+            <a:spLocks noGrp="1"/>
+          </p:cNvSpPr>
+          <p:nvPr>
+            <p:ph type="title"/>
+          </p:nvPr>
+        </p:nvSpPr>
+        <p:spPr/>
+        <p:txBody>
+          <a:bodyPr/>
+          <a:lstStyle/>
+          <a:p>
+            <a:endParaRPr lang="zh-TW" altLang="en-US"/>
+          </a:p>
+        </p:txBody>
+      </p:sp>
+      <p:sp>
+        <p:nvSpPr>
+          <p:cNvPr id="3" name="內容版面配置區 2">
+            <a:extLst>
+              <a:ext uri="{FF2B5EF4-FFF2-40B4-BE49-F238E27FC236}">
+                <a16:creationId xmlns:a16="http://schemas.microsoft.com/office/drawing/2014/main" id="{F434347D-85E8-4C11-83DE-E105AD501B95}"/>
+              </a:ext>
+            </a:extLst>
+          </p:cNvPr>
+          <p:cNvSpPr>
+            <a:spLocks noGrp="1"/>
+          </p:cNvSpPr>
+          <p:nvPr>
+            <p:ph idx="1"/>
+          </p:nvPr>
+        </p:nvSpPr>
+        <p:spPr/>
+        <p:txBody>
+          <a:bodyPr/>
+          <a:lstStyle/>
+          <a:p>
+            <a:endParaRPr lang="zh-TW" altLang="en-US"/>
+          </a:p>
+        </p:txBody>
+      </p:sp>
+      <p:pic>
+        <p:nvPicPr>
+          <p:cNvPr id="4" name="圖片 3">
+            <a:extLst>
+              <a:ext uri="{FF2B5EF4-FFF2-40B4-BE49-F238E27FC236}">
+                <a16:creationId xmlns:a16="http://schemas.microsoft.com/office/drawing/2014/main" id="{E4367D18-EA43-45D4-BFB7-12D1DE5A85D0}"/>
+              </a:ext>
+            </a:extLst>
+          </p:cNvPr>
+          <p:cNvPicPr>
+            <a:picLocks noChangeAspect="1"/>
+          </p:cNvPicPr>
+          <p:nvPr/>
+        </p:nvPicPr>
+        <p:blipFill>
+          <a:blip r:embed="rId2"/>
+          <a:stretch>
+            <a:fillRect/>
+          </a:stretch>
+        </p:blipFill>
+        <p:spPr>
+          <a:xfrm>
+            <a:off x="0" y="544597"/>
+            <a:ext cx="12192000" cy="5768805"/>
+          </a:xfrm>
+          <a:prstGeom prst="rect">
+            <a:avLst/>
+          </a:prstGeom>
+        </p:spPr>
+      </p:pic>
+    </p:spTree>
+    <p:extLst>
+      <p:ext uri="{BB962C8B-B14F-4D97-AF65-F5344CB8AC3E}">
+        <p14:creationId xmlns:p14="http://schemas.microsoft.com/office/powerpoint/2010/main" val="287465910"/>
+      </p:ext>
+    </p:extLst>
+  </p:cSld>
+  <p:clrMapOvr>
+    <a:masterClrMapping/>
+  </p:clrMapOvr>
+</p:sld>
+</file>
+
+<file path=ppt/slides/slide25.xml><?xml version="1.0" encoding="utf-8"?>
+<p:sld xmlns:a="http://schemas.openxmlformats.org/drawingml/2006/main" xmlns:r="http://schemas.openxmlformats.org/officeDocument/2006/relationships" xmlns:p="http://schemas.openxmlformats.org/presentationml/2006/main">
+  <p:cSld>
+    <p:spTree>
+      <p:nvGrpSpPr>
+        <p:cNvPr id="1" name=""/>
+        <p:cNvGrpSpPr/>
+        <p:nvPr/>
+      </p:nvGrpSpPr>
+      <p:grpSpPr>
+        <a:xfrm>
+          <a:off x="0" y="0"/>
+          <a:ext cx="0" cy="0"/>
+          <a:chOff x="0" y="0"/>
+          <a:chExt cx="0" cy="0"/>
+        </a:xfrm>
+      </p:grpSpPr>
+      <p:sp>
+        <p:nvSpPr>
+          <p:cNvPr id="2" name="標題 1">
+            <a:extLst>
+              <a:ext uri="{FF2B5EF4-FFF2-40B4-BE49-F238E27FC236}">
+                <a16:creationId xmlns:a16="http://schemas.microsoft.com/office/drawing/2014/main" id="{11277F4E-06F7-4B0F-B5E3-7EA1CADD9E56}"/>
+              </a:ext>
+            </a:extLst>
+          </p:cNvPr>
+          <p:cNvSpPr>
+            <a:spLocks noGrp="1"/>
+          </p:cNvSpPr>
+          <p:nvPr>
+            <p:ph type="title"/>
+          </p:nvPr>
+        </p:nvSpPr>
+        <p:spPr/>
+        <p:txBody>
+          <a:bodyPr/>
+          <a:lstStyle/>
+          <a:p>
+            <a:endParaRPr lang="zh-TW" altLang="en-US"/>
+          </a:p>
+        </p:txBody>
+      </p:sp>
+      <p:sp>
+        <p:nvSpPr>
+          <p:cNvPr id="3" name="內容版面配置區 2">
+            <a:extLst>
+              <a:ext uri="{FF2B5EF4-FFF2-40B4-BE49-F238E27FC236}">
+                <a16:creationId xmlns:a16="http://schemas.microsoft.com/office/drawing/2014/main" id="{00EB903F-24CF-4015-AE23-BAA4C6CAABB1}"/>
+              </a:ext>
+            </a:extLst>
+          </p:cNvPr>
+          <p:cNvSpPr>
+            <a:spLocks noGrp="1"/>
+          </p:cNvSpPr>
+          <p:nvPr>
+            <p:ph idx="1"/>
+          </p:nvPr>
+        </p:nvSpPr>
+        <p:spPr/>
+        <p:txBody>
+          <a:bodyPr/>
+          <a:lstStyle/>
+          <a:p>
+            <a:endParaRPr lang="zh-TW" altLang="en-US"/>
+          </a:p>
+        </p:txBody>
+      </p:sp>
+      <p:pic>
+        <p:nvPicPr>
+          <p:cNvPr id="4" name="圖片 3">
+            <a:extLst>
+              <a:ext uri="{FF2B5EF4-FFF2-40B4-BE49-F238E27FC236}">
+                <a16:creationId xmlns:a16="http://schemas.microsoft.com/office/drawing/2014/main" id="{DFB43D11-AA9E-415C-998D-F5F1E1E05376}"/>
+              </a:ext>
+            </a:extLst>
+          </p:cNvPr>
+          <p:cNvPicPr>
+            <a:picLocks noChangeAspect="1"/>
+          </p:cNvPicPr>
+          <p:nvPr/>
+        </p:nvPicPr>
+        <p:blipFill>
+          <a:blip r:embed="rId2"/>
+          <a:stretch>
+            <a:fillRect/>
+          </a:stretch>
+        </p:blipFill>
+        <p:spPr>
+          <a:xfrm>
+            <a:off x="0" y="550951"/>
+            <a:ext cx="12192000" cy="5756098"/>
+          </a:xfrm>
+          <a:prstGeom prst="rect">
+            <a:avLst/>
+          </a:prstGeom>
+        </p:spPr>
+      </p:pic>
+    </p:spTree>
+    <p:extLst>
+      <p:ext uri="{BB962C8B-B14F-4D97-AF65-F5344CB8AC3E}">
+        <p14:creationId xmlns:p14="http://schemas.microsoft.com/office/powerpoint/2010/main" val="918543539"/>
+      </p:ext>
+    </p:extLst>
+  </p:cSld>
+  <p:clrMapOvr>
+    <a:masterClrMapping/>
+  </p:clrMapOvr>
+</p:sld>
+</file>
+
+<file path=ppt/slides/slide26.xml><?xml version="1.0" encoding="utf-8"?>
+<p:sld xmlns:a="http://schemas.openxmlformats.org/drawingml/2006/main" xmlns:r="http://schemas.openxmlformats.org/officeDocument/2006/relationships" xmlns:p="http://schemas.openxmlformats.org/presentationml/2006/main">
+  <p:cSld>
+    <p:spTree>
+      <p:nvGrpSpPr>
+        <p:cNvPr id="1" name=""/>
+        <p:cNvGrpSpPr/>
+        <p:nvPr/>
+      </p:nvGrpSpPr>
+      <p:grpSpPr>
+        <a:xfrm>
+          <a:off x="0" y="0"/>
+          <a:ext cx="0" cy="0"/>
+          <a:chOff x="0" y="0"/>
+          <a:chExt cx="0" cy="0"/>
+        </a:xfrm>
+      </p:grpSpPr>
+      <p:sp>
+        <p:nvSpPr>
+          <p:cNvPr id="2" name="標題 1">
+            <a:extLst>
+              <a:ext uri="{FF2B5EF4-FFF2-40B4-BE49-F238E27FC236}">
+                <a16:creationId xmlns:a16="http://schemas.microsoft.com/office/drawing/2014/main" id="{A91AA2B3-1A83-4C27-9008-7F1AD6B1A296}"/>
+              </a:ext>
+            </a:extLst>
+          </p:cNvPr>
+          <p:cNvSpPr>
+            <a:spLocks noGrp="1"/>
+          </p:cNvSpPr>
+          <p:nvPr>
+            <p:ph type="title"/>
+          </p:nvPr>
+        </p:nvSpPr>
+        <p:spPr>
+          <a:xfrm>
+            <a:off x="838200" y="4261378"/>
+            <a:ext cx="10515600" cy="1325563"/>
+          </a:xfrm>
+        </p:spPr>
+        <p:txBody>
+          <a:bodyPr/>
+          <a:lstStyle/>
+          <a:p>
+            <a:r>
+              <a:rPr lang="zh-TW" altLang="en-US" b="1" dirty="0"/>
+              <a:t>成果展示</a:t>
+            </a:r>
+          </a:p>
+        </p:txBody>
+      </p:sp>
+    </p:spTree>
+    <p:extLst>
+      <p:ext uri="{BB962C8B-B14F-4D97-AF65-F5344CB8AC3E}">
+        <p14:creationId xmlns:p14="http://schemas.microsoft.com/office/powerpoint/2010/main" val="3991751754"/>
+      </p:ext>
+    </p:extLst>
+  </p:cSld>
+  <p:clrMapOvr>
+    <a:masterClrMapping/>
+  </p:clrMapOvr>
+</p:sld>
+</file>
+
+<file path=ppt/slides/slide27.xml><?xml version="1.0" encoding="utf-8"?>
+<p:sld xmlns:a="http://schemas.openxmlformats.org/drawingml/2006/main" xmlns:r="http://schemas.openxmlformats.org/officeDocument/2006/relationships" xmlns:p="http://schemas.openxmlformats.org/presentationml/2006/main">
+  <p:cSld>
+    <p:spTree>
+      <p:nvGrpSpPr>
+        <p:cNvPr id="1" name=""/>
+        <p:cNvGrpSpPr/>
+        <p:nvPr/>
+      </p:nvGrpSpPr>
+      <p:grpSpPr>
+        <a:xfrm>
+          <a:off x="0" y="0"/>
+          <a:ext cx="0" cy="0"/>
+          <a:chOff x="0" y="0"/>
+          <a:chExt cx="0" cy="0"/>
+        </a:xfrm>
+      </p:grpSpPr>
+      <p:pic>
+        <p:nvPicPr>
+          <p:cNvPr id="2" name="圖片 1">
+            <a:extLst>
+              <a:ext uri="{FF2B5EF4-FFF2-40B4-BE49-F238E27FC236}">
+                <a16:creationId xmlns:a16="http://schemas.microsoft.com/office/drawing/2014/main" id="{2023D4B0-5F70-48B1-BCB6-7805D1E10205}"/>
+              </a:ext>
+            </a:extLst>
+          </p:cNvPr>
+          <p:cNvPicPr>
+            <a:picLocks noChangeAspect="1"/>
+          </p:cNvPicPr>
+          <p:nvPr/>
+        </p:nvPicPr>
+        <p:blipFill>
+          <a:blip r:embed="rId2"/>
+          <a:stretch>
+            <a:fillRect/>
+          </a:stretch>
+        </p:blipFill>
+        <p:spPr>
+          <a:xfrm>
+            <a:off x="872067" y="1022937"/>
+            <a:ext cx="9508068" cy="5544464"/>
+          </a:xfrm>
+          <a:prstGeom prst="rect">
+            <a:avLst/>
+          </a:prstGeom>
+        </p:spPr>
+      </p:pic>
+      <p:sp>
+        <p:nvSpPr>
+          <p:cNvPr id="5" name="標題 1">
+            <a:extLst>
+              <a:ext uri="{FF2B5EF4-FFF2-40B4-BE49-F238E27FC236}">
+                <a16:creationId xmlns:a16="http://schemas.microsoft.com/office/drawing/2014/main" id="{637DED57-B5B6-47B7-AF15-57A4EAE599A3}"/>
+              </a:ext>
+            </a:extLst>
+          </p:cNvPr>
+          <p:cNvSpPr txBox="1">
+            <a:spLocks/>
+          </p:cNvSpPr>
+          <p:nvPr/>
+        </p:nvSpPr>
+        <p:spPr>
+          <a:xfrm>
+            <a:off x="728134" y="0"/>
+            <a:ext cx="10515600" cy="1325563"/>
+          </a:xfrm>
+          <a:prstGeom prst="rect">
+            <a:avLst/>
+          </a:prstGeom>
+        </p:spPr>
+        <p:txBody>
+          <a:bodyPr vert="horz" lIns="91440" tIns="45720" rIns="91440" bIns="45720" rtlCol="0" anchor="ctr">
+            <a:normAutofit/>
+          </a:bodyPr>
+          <a:lstStyle>
+            <a:lvl1pPr algn="l" defTabSz="914400" rtl="0" eaLnBrk="1" latinLnBrk="0" hangingPunct="1">
+              <a:lnSpc>
+                <a:spcPct val="90000"/>
+              </a:lnSpc>
+              <a:spcBef>
+                <a:spcPct val="0"/>
+              </a:spcBef>
+              <a:buNone/>
+              <a:defRPr sz="4400" kern="1200">
+                <a:solidFill>
+                  <a:schemeClr val="tx1"/>
+                </a:solidFill>
+                <a:latin typeface="+mj-lt"/>
+                <a:ea typeface="+mj-ea"/>
+                <a:cs typeface="+mj-cs"/>
+              </a:defRPr>
+            </a:lvl1pPr>
+          </a:lstStyle>
+          <a:p>
+            <a:r>
+              <a:rPr lang="zh-TW" altLang="en-US" sz="3200" dirty="0"/>
+              <a:t>點選 </a:t>
+            </a:r>
+            <a:r>
+              <a:rPr lang="en-US" altLang="zh-TW" sz="3200" dirty="0"/>
+              <a:t>[</a:t>
+            </a:r>
+            <a:r>
+              <a:rPr lang="zh-TW" altLang="en-US" sz="3200" dirty="0"/>
+              <a:t>成果展示</a:t>
+            </a:r>
+            <a:r>
+              <a:rPr lang="en-US" altLang="zh-TW" sz="3200" dirty="0"/>
+              <a:t>]</a:t>
+            </a:r>
+          </a:p>
+        </p:txBody>
+      </p:sp>
+      <p:sp>
+        <p:nvSpPr>
+          <p:cNvPr id="6" name="矩形 5">
+            <a:extLst>
+              <a:ext uri="{FF2B5EF4-FFF2-40B4-BE49-F238E27FC236}">
+                <a16:creationId xmlns:a16="http://schemas.microsoft.com/office/drawing/2014/main" id="{2E621A24-1E0A-45B2-883D-99977B828628}"/>
+              </a:ext>
+            </a:extLst>
+          </p:cNvPr>
+          <p:cNvSpPr/>
+          <p:nvPr/>
+        </p:nvSpPr>
+        <p:spPr>
+          <a:xfrm>
+            <a:off x="7884227" y="1093084"/>
+            <a:ext cx="633240" cy="240946"/>
+          </a:xfrm>
+          <a:prstGeom prst="rect">
+            <a:avLst/>
+          </a:prstGeom>
+          <a:noFill/>
+          <a:ln>
+            <a:solidFill>
+              <a:srgbClr val="FF0000"/>
+            </a:solidFill>
+          </a:ln>
+        </p:spPr>
+        <p:style>
+          <a:lnRef idx="2">
+            <a:schemeClr val="accent1">
+              <a:shade val="50000"/>
+            </a:schemeClr>
+          </a:lnRef>
+          <a:fillRef idx="1">
+            <a:schemeClr val="accent1"/>
+          </a:fillRef>
+          <a:effectRef idx="0">
+            <a:schemeClr val="accent1"/>
+          </a:effectRef>
+          <a:fontRef idx="minor">
+            <a:schemeClr val="lt1"/>
+          </a:fontRef>
+        </p:style>
+        <p:txBody>
+          <a:bodyPr rtlCol="0" anchor="ctr"/>
+          <a:lstStyle/>
+          <a:p>
+            <a:pPr algn="ctr"/>
+            <a:endParaRPr lang="zh-TW" altLang="en-US"/>
+          </a:p>
+        </p:txBody>
+      </p:sp>
+    </p:spTree>
+    <p:extLst>
+      <p:ext uri="{BB962C8B-B14F-4D97-AF65-F5344CB8AC3E}">
+        <p14:creationId xmlns:p14="http://schemas.microsoft.com/office/powerpoint/2010/main" val="3799189062"/>
+      </p:ext>
+    </p:extLst>
+  </p:cSld>
+  <p:clrMapOvr>
+    <a:masterClrMapping/>
+  </p:clrMapOvr>
+</p:sld>
+</file>
+
+<file path=ppt/slides/slide28.xml><?xml version="1.0" encoding="utf-8"?>
+<p:sld xmlns:a="http://schemas.openxmlformats.org/drawingml/2006/main" xmlns:r="http://schemas.openxmlformats.org/officeDocument/2006/relationships" xmlns:p="http://schemas.openxmlformats.org/presentationml/2006/main">
+  <p:cSld>
+    <p:spTree>
+      <p:nvGrpSpPr>
+        <p:cNvPr id="1" name=""/>
+        <p:cNvGrpSpPr/>
+        <p:nvPr/>
+      </p:nvGrpSpPr>
+      <p:grpSpPr>
+        <a:xfrm>
+          <a:off x="0" y="0"/>
+          <a:ext cx="0" cy="0"/>
+          <a:chOff x="0" y="0"/>
+          <a:chExt cx="0" cy="0"/>
+        </a:xfrm>
+      </p:grpSpPr>
+      <p:sp>
+        <p:nvSpPr>
+          <p:cNvPr id="5" name="標題 1">
+            <a:extLst>
+              <a:ext uri="{FF2B5EF4-FFF2-40B4-BE49-F238E27FC236}">
+                <a16:creationId xmlns:a16="http://schemas.microsoft.com/office/drawing/2014/main" id="{637DED57-B5B6-47B7-AF15-57A4EAE599A3}"/>
+              </a:ext>
+            </a:extLst>
+          </p:cNvPr>
+          <p:cNvSpPr txBox="1">
+            <a:spLocks/>
+          </p:cNvSpPr>
+          <p:nvPr/>
+        </p:nvSpPr>
+        <p:spPr>
+          <a:xfrm>
+            <a:off x="728134" y="0"/>
+            <a:ext cx="10515600" cy="1325563"/>
+          </a:xfrm>
+          <a:prstGeom prst="rect">
+            <a:avLst/>
+          </a:prstGeom>
+        </p:spPr>
+        <p:txBody>
+          <a:bodyPr vert="horz" lIns="91440" tIns="45720" rIns="91440" bIns="45720" rtlCol="0" anchor="ctr">
+            <a:normAutofit/>
+          </a:bodyPr>
+          <a:lstStyle>
+            <a:lvl1pPr algn="l" defTabSz="914400" rtl="0" eaLnBrk="1" latinLnBrk="0" hangingPunct="1">
+              <a:lnSpc>
+                <a:spcPct val="90000"/>
+              </a:lnSpc>
+              <a:spcBef>
+                <a:spcPct val="0"/>
+              </a:spcBef>
+              <a:buNone/>
+              <a:defRPr sz="4400" kern="1200">
+                <a:solidFill>
+                  <a:schemeClr val="tx1"/>
+                </a:solidFill>
+                <a:latin typeface="+mj-lt"/>
+                <a:ea typeface="+mj-ea"/>
+                <a:cs typeface="+mj-cs"/>
+              </a:defRPr>
+            </a:lvl1pPr>
+          </a:lstStyle>
+          <a:p>
+            <a:r>
+              <a:rPr lang="zh-TW" altLang="en-US" sz="3200" dirty="0"/>
+              <a:t>請按照順序進行投影</a:t>
+            </a:r>
+            <a:endParaRPr lang="en-US" altLang="zh-TW" sz="3200" dirty="0"/>
+          </a:p>
+        </p:txBody>
+      </p:sp>
+      <p:pic>
+        <p:nvPicPr>
+          <p:cNvPr id="6" name="圖片 5">
+            <a:extLst>
+              <a:ext uri="{FF2B5EF4-FFF2-40B4-BE49-F238E27FC236}">
+                <a16:creationId xmlns:a16="http://schemas.microsoft.com/office/drawing/2014/main" id="{0083C8A8-B857-4440-9630-69600C3FDBBA}"/>
+              </a:ext>
+            </a:extLst>
+          </p:cNvPr>
+          <p:cNvPicPr>
+            <a:picLocks noChangeAspect="1"/>
+          </p:cNvPicPr>
+          <p:nvPr/>
+        </p:nvPicPr>
+        <p:blipFill>
+          <a:blip r:embed="rId2"/>
+          <a:stretch>
+            <a:fillRect/>
+          </a:stretch>
+        </p:blipFill>
+        <p:spPr>
+          <a:xfrm>
+            <a:off x="872067" y="1022937"/>
+            <a:ext cx="9508068" cy="5544464"/>
+          </a:xfrm>
+          <a:prstGeom prst="rect">
+            <a:avLst/>
+          </a:prstGeom>
+        </p:spPr>
+      </p:pic>
+      <p:sp>
+        <p:nvSpPr>
+          <p:cNvPr id="8" name="箭號: 向下 7">
+            <a:extLst>
+              <a:ext uri="{FF2B5EF4-FFF2-40B4-BE49-F238E27FC236}">
+                <a16:creationId xmlns:a16="http://schemas.microsoft.com/office/drawing/2014/main" id="{BBAD8F5A-EDFA-4298-B397-9E2515408E33}"/>
+              </a:ext>
+            </a:extLst>
+          </p:cNvPr>
+          <p:cNvSpPr/>
+          <p:nvPr/>
+        </p:nvSpPr>
+        <p:spPr>
+          <a:xfrm rot="16200000">
+            <a:off x="563033" y="2396066"/>
+            <a:ext cx="330200" cy="372533"/>
+          </a:xfrm>
+          <a:prstGeom prst="downArrow">
+            <a:avLst/>
+          </a:prstGeom>
+          <a:solidFill>
+            <a:srgbClr val="FF0000"/>
+          </a:solidFill>
+          <a:ln>
+            <a:solidFill>
+              <a:srgbClr val="FF0000"/>
+            </a:solidFill>
+          </a:ln>
+        </p:spPr>
+        <p:style>
+          <a:lnRef idx="2">
+            <a:schemeClr val="accent1">
+              <a:shade val="50000"/>
+            </a:schemeClr>
+          </a:lnRef>
+          <a:fillRef idx="1">
+            <a:schemeClr val="accent1"/>
+          </a:fillRef>
+          <a:effectRef idx="0">
+            <a:schemeClr val="accent1"/>
+          </a:effectRef>
+          <a:fontRef idx="minor">
+            <a:schemeClr val="lt1"/>
+          </a:fontRef>
+        </p:style>
+        <p:txBody>
+          <a:bodyPr rtlCol="0" anchor="ctr"/>
+          <a:lstStyle/>
+          <a:p>
+            <a:pPr algn="ctr"/>
+            <a:endParaRPr lang="zh-TW" altLang="en-US"/>
+          </a:p>
+        </p:txBody>
+      </p:sp>
+      <p:sp>
+        <p:nvSpPr>
+          <p:cNvPr id="2" name="文字方塊 1">
+            <a:extLst>
+              <a:ext uri="{FF2B5EF4-FFF2-40B4-BE49-F238E27FC236}">
+                <a16:creationId xmlns:a16="http://schemas.microsoft.com/office/drawing/2014/main" id="{D920CFFB-AB37-41B8-A55A-BC55C4EE74AA}"/>
+              </a:ext>
+            </a:extLst>
+          </p:cNvPr>
+          <p:cNvSpPr txBox="1"/>
+          <p:nvPr/>
+        </p:nvSpPr>
+        <p:spPr>
+          <a:xfrm rot="5400000">
+            <a:off x="572354" y="3829820"/>
+            <a:ext cx="343364" cy="369332"/>
+          </a:xfrm>
+          <a:prstGeom prst="rect">
+            <a:avLst/>
+          </a:prstGeom>
+          <a:noFill/>
+        </p:spPr>
+        <p:txBody>
+          <a:bodyPr wrap="none" rtlCol="0">
+            <a:spAutoFit/>
+          </a:bodyPr>
+          <a:lstStyle/>
+          <a:p>
+            <a:r>
+              <a:rPr lang="en-US" altLang="zh-TW" dirty="0">
+                <a:solidFill>
+                  <a:srgbClr val="FF0000"/>
+                </a:solidFill>
+              </a:rPr>
+              <a:t>…</a:t>
+            </a:r>
+            <a:endParaRPr lang="zh-TW" altLang="en-US" dirty="0">
+              <a:solidFill>
+                <a:srgbClr val="FF0000"/>
+              </a:solidFill>
+            </a:endParaRPr>
+          </a:p>
+        </p:txBody>
+      </p:sp>
+      <p:sp>
+        <p:nvSpPr>
+          <p:cNvPr id="10" name="箭號: 向下 9">
+            <a:extLst>
+              <a:ext uri="{FF2B5EF4-FFF2-40B4-BE49-F238E27FC236}">
+                <a16:creationId xmlns:a16="http://schemas.microsoft.com/office/drawing/2014/main" id="{5CEB211A-3A5D-49DE-A885-CBFDF7AB09B2}"/>
+              </a:ext>
+            </a:extLst>
+          </p:cNvPr>
+          <p:cNvSpPr/>
+          <p:nvPr/>
+        </p:nvSpPr>
+        <p:spPr>
+          <a:xfrm rot="16200000">
+            <a:off x="550620" y="3132666"/>
+            <a:ext cx="330200" cy="372533"/>
+          </a:xfrm>
+          <a:prstGeom prst="downArrow">
+            <a:avLst/>
+          </a:prstGeom>
+          <a:solidFill>
+            <a:srgbClr val="FF0000"/>
+          </a:solidFill>
+          <a:ln>
+            <a:solidFill>
+              <a:srgbClr val="FF0000"/>
+            </a:solidFill>
+          </a:ln>
+        </p:spPr>
+        <p:style>
+          <a:lnRef idx="2">
+            <a:schemeClr val="accent1">
+              <a:shade val="50000"/>
+            </a:schemeClr>
+          </a:lnRef>
+          <a:fillRef idx="1">
+            <a:schemeClr val="accent1"/>
+          </a:fillRef>
+          <a:effectRef idx="0">
+            <a:schemeClr val="accent1"/>
+          </a:effectRef>
+          <a:fontRef idx="minor">
+            <a:schemeClr val="lt1"/>
+          </a:fontRef>
+        </p:style>
+        <p:txBody>
+          <a:bodyPr rtlCol="0" anchor="ctr"/>
+          <a:lstStyle/>
+          <a:p>
+            <a:pPr algn="ctr"/>
+            <a:endParaRPr lang="zh-TW" altLang="en-US"/>
+          </a:p>
+        </p:txBody>
+      </p:sp>
+    </p:spTree>
+    <p:extLst>
+      <p:ext uri="{BB962C8B-B14F-4D97-AF65-F5344CB8AC3E}">
+        <p14:creationId xmlns:p14="http://schemas.microsoft.com/office/powerpoint/2010/main" val="506412634"/>
       </p:ext>
     </p:extLst>
   </p:cSld>
@@ -4210,12 +6998,76 @@
           <a:chExt cx="0" cy="0"/>
         </a:xfrm>
       </p:grpSpPr>
+      <p:sp>
+        <p:nvSpPr>
+          <p:cNvPr id="2" name="標題 1">
+            <a:extLst>
+              <a:ext uri="{FF2B5EF4-FFF2-40B4-BE49-F238E27FC236}">
+                <a16:creationId xmlns:a16="http://schemas.microsoft.com/office/drawing/2014/main" id="{E91D5D0C-82CE-436F-BFD6-9646E0EDD5A1}"/>
+              </a:ext>
+            </a:extLst>
+          </p:cNvPr>
+          <p:cNvSpPr>
+            <a:spLocks noGrp="1"/>
+          </p:cNvSpPr>
+          <p:nvPr>
+            <p:ph type="title"/>
+          </p:nvPr>
+        </p:nvSpPr>
+        <p:spPr>
+          <a:xfrm>
+            <a:off x="728134" y="0"/>
+            <a:ext cx="10515600" cy="1325563"/>
+          </a:xfrm>
+        </p:spPr>
+        <p:txBody>
+          <a:bodyPr>
+            <a:normAutofit/>
+          </a:bodyPr>
+          <a:lstStyle/>
+          <a:p>
+            <a:r>
+              <a:rPr lang="zh-TW" altLang="en-US" sz="3200" dirty="0"/>
+              <a:t>選擇 </a:t>
+            </a:r>
+            <a:r>
+              <a:rPr lang="en-US" altLang="zh-TW" sz="3200" dirty="0"/>
+              <a:t>[</a:t>
+            </a:r>
+            <a:r>
+              <a:rPr lang="zh-TW" altLang="en-US" sz="3200" dirty="0"/>
+              <a:t>會議日期</a:t>
+            </a:r>
+            <a:r>
+              <a:rPr lang="en-US" altLang="zh-TW" sz="3200" dirty="0"/>
+              <a:t>]</a:t>
+            </a:r>
+            <a:r>
+              <a:rPr lang="zh-TW" altLang="en-US" sz="3200" dirty="0"/>
+              <a:t> 後點選 </a:t>
+            </a:r>
+            <a:r>
+              <a:rPr lang="en-US" altLang="zh-TW" sz="3200" dirty="0"/>
+              <a:t>[</a:t>
+            </a:r>
+            <a:r>
+              <a:rPr lang="zh-TW" altLang="en-US" sz="3200" dirty="0"/>
+              <a:t>前往</a:t>
+            </a:r>
+            <a:r>
+              <a:rPr lang="en-US" altLang="zh-TW" sz="3200" dirty="0"/>
+              <a:t>]</a:t>
+            </a:r>
+            <a:endParaRPr lang="zh-TW" altLang="en-US" sz="3200" dirty="0"/>
+          </a:p>
+        </p:txBody>
+      </p:sp>
       <p:pic>
         <p:nvPicPr>
           <p:cNvPr id="4" name="圖片 3">
             <a:extLst>
               <a:ext uri="{FF2B5EF4-FFF2-40B4-BE49-F238E27FC236}">
-                <a16:creationId xmlns:a16="http://schemas.microsoft.com/office/drawing/2014/main" id="{8681539C-041C-4C39-8950-1C5E9F846475}"/>
+                <a16:creationId xmlns:a16="http://schemas.microsoft.com/office/drawing/2014/main" id="{37C59DB8-9D26-4BBC-80DD-604960D9A80E}"/>
               </a:ext>
             </a:extLst>
           </p:cNvPr>
@@ -4232,8 +7084,8 @@
         </p:blipFill>
         <p:spPr>
           <a:xfrm>
-            <a:off x="838200" y="1340009"/>
-            <a:ext cx="9943350" cy="5322570"/>
+            <a:off x="821266" y="964269"/>
+            <a:ext cx="9584267" cy="5675962"/>
           </a:xfrm>
           <a:prstGeom prst="rect">
             <a:avLst/>
@@ -4242,77 +7094,10 @@
       </p:pic>
       <p:sp>
         <p:nvSpPr>
-          <p:cNvPr id="5" name="標題 1">
-            <a:extLst>
-              <a:ext uri="{FF2B5EF4-FFF2-40B4-BE49-F238E27FC236}">
-                <a16:creationId xmlns:a16="http://schemas.microsoft.com/office/drawing/2014/main" id="{CCAEF51E-D560-4397-81F3-4B13FF36988C}"/>
-              </a:ext>
-            </a:extLst>
-          </p:cNvPr>
-          <p:cNvSpPr txBox="1">
-            <a:spLocks/>
-          </p:cNvSpPr>
-          <p:nvPr/>
-        </p:nvSpPr>
-        <p:spPr>
-          <a:xfrm>
-            <a:off x="728134" y="0"/>
-            <a:ext cx="10515600" cy="1325563"/>
-          </a:xfrm>
-          <a:prstGeom prst="rect">
-            <a:avLst/>
-          </a:prstGeom>
-        </p:spPr>
-        <p:txBody>
-          <a:bodyPr vert="horz" lIns="91440" tIns="45720" rIns="91440" bIns="45720" rtlCol="0" anchor="ctr">
-            <a:normAutofit/>
-          </a:bodyPr>
-          <a:lstStyle>
-            <a:lvl1pPr algn="l" defTabSz="914400" rtl="0" eaLnBrk="1" latinLnBrk="0" hangingPunct="1">
-              <a:lnSpc>
-                <a:spcPct val="90000"/>
-              </a:lnSpc>
-              <a:spcBef>
-                <a:spcPct val="0"/>
-              </a:spcBef>
-              <a:buNone/>
-              <a:defRPr sz="4400" kern="1200">
-                <a:solidFill>
-                  <a:schemeClr val="tx1"/>
-                </a:solidFill>
-                <a:latin typeface="+mj-lt"/>
-                <a:ea typeface="+mj-ea"/>
-                <a:cs typeface="+mj-cs"/>
-              </a:defRPr>
-            </a:lvl1pPr>
-          </a:lstStyle>
-          <a:p>
-            <a:r>
-              <a:rPr lang="zh-TW" altLang="en-US" sz="3200" dirty="0"/>
-              <a:t>點選 </a:t>
-            </a:r>
-            <a:r>
-              <a:rPr lang="en-US" altLang="zh-TW" sz="3200" dirty="0"/>
-              <a:t>[</a:t>
-            </a:r>
-            <a:r>
-              <a:rPr lang="zh-TW" altLang="en-US" sz="3200" dirty="0"/>
-              <a:t>我的報告</a:t>
-            </a:r>
-            <a:r>
-              <a:rPr lang="en-US" altLang="zh-TW" sz="3200" dirty="0"/>
-              <a:t>]</a:t>
-            </a:r>
-            <a:endParaRPr lang="zh-TW" altLang="en-US" sz="3200" dirty="0"/>
-          </a:p>
-        </p:txBody>
-      </p:sp>
-      <p:sp>
-        <p:nvSpPr>
-          <p:cNvPr id="6" name="矩形 5">
-            <a:extLst>
-              <a:ext uri="{FF2B5EF4-FFF2-40B4-BE49-F238E27FC236}">
-                <a16:creationId xmlns:a16="http://schemas.microsoft.com/office/drawing/2014/main" id="{F1DAB1B0-8FB3-46AF-B46A-D42B67C75031}"/>
+          <p:cNvPr id="5" name="矩形 4">
+            <a:extLst>
+              <a:ext uri="{FF2B5EF4-FFF2-40B4-BE49-F238E27FC236}">
+                <a16:creationId xmlns:a16="http://schemas.microsoft.com/office/drawing/2014/main" id="{E0726924-D046-4A61-950D-BFACDA8FE401}"/>
               </a:ext>
             </a:extLst>
           </p:cNvPr>
@@ -4321,8 +7106,8 @@
         </p:nvSpPr>
         <p:spPr>
           <a:xfrm>
-            <a:off x="10010955" y="1423358"/>
-            <a:ext cx="590909" cy="232914"/>
+            <a:off x="4343400" y="5130800"/>
+            <a:ext cx="3064933" cy="397933"/>
           </a:xfrm>
           <a:prstGeom prst="rect">
             <a:avLst/>
@@ -4362,7 +7147,7 @@
     </p:spTree>
     <p:extLst>
       <p:ext uri="{BB962C8B-B14F-4D97-AF65-F5344CB8AC3E}">
-        <p14:creationId xmlns:p14="http://schemas.microsoft.com/office/powerpoint/2010/main" val="3470006312"/>
+        <p14:creationId xmlns:p14="http://schemas.microsoft.com/office/powerpoint/2010/main" val="860834749"/>
       </p:ext>
     </p:extLst>
   </p:cSld>
@@ -4389,42 +7174,12 @@
           <a:chExt cx="0" cy="0"/>
         </a:xfrm>
       </p:grpSpPr>
-      <p:pic>
-        <p:nvPicPr>
-          <p:cNvPr id="4" name="圖片 3">
-            <a:extLst>
-              <a:ext uri="{FF2B5EF4-FFF2-40B4-BE49-F238E27FC236}">
-                <a16:creationId xmlns:a16="http://schemas.microsoft.com/office/drawing/2014/main" id="{FBB85150-862B-4BD6-9A44-00B79B1C4AB6}"/>
-              </a:ext>
-            </a:extLst>
-          </p:cNvPr>
-          <p:cNvPicPr>
-            <a:picLocks noChangeAspect="1"/>
-          </p:cNvPicPr>
-          <p:nvPr/>
-        </p:nvPicPr>
-        <p:blipFill>
-          <a:blip r:embed="rId2"/>
-          <a:stretch>
-            <a:fillRect/>
-          </a:stretch>
-        </p:blipFill>
-        <p:spPr>
-          <a:xfrm>
-            <a:off x="750547" y="1690688"/>
-            <a:ext cx="10688080" cy="3596146"/>
-          </a:xfrm>
-          <a:prstGeom prst="rect">
-            <a:avLst/>
-          </a:prstGeom>
-        </p:spPr>
-      </p:pic>
       <p:sp>
         <p:nvSpPr>
           <p:cNvPr id="5" name="標題 1">
             <a:extLst>
               <a:ext uri="{FF2B5EF4-FFF2-40B4-BE49-F238E27FC236}">
-                <a16:creationId xmlns:a16="http://schemas.microsoft.com/office/drawing/2014/main" id="{D19A21AF-8592-42C5-9394-E5E3D2E017CB}"/>
+                <a16:creationId xmlns:a16="http://schemas.microsoft.com/office/drawing/2014/main" id="{CCAEF51E-D560-4397-81F3-4B13FF36988C}"/>
               </a:ext>
             </a:extLst>
           </p:cNvPr>
@@ -4468,17 +7223,60 @@
           <a:p>
             <a:r>
               <a:rPr lang="zh-TW" altLang="en-US" sz="3200" dirty="0"/>
-              <a:t>找到自己的報告，並點選自己的名字</a:t>
-            </a:r>
-          </a:p>
-        </p:txBody>
-      </p:sp>
+              <a:t>點選 </a:t>
+            </a:r>
+            <a:r>
+              <a:rPr lang="en-US" altLang="zh-TW" sz="3200" dirty="0"/>
+              <a:t>[</a:t>
+            </a:r>
+            <a:r>
+              <a:rPr lang="zh-TW" altLang="en-US" sz="3200" dirty="0"/>
+              <a:t>個人報告上傳</a:t>
+            </a:r>
+            <a:r>
+              <a:rPr lang="en-US" altLang="zh-TW" sz="3200" dirty="0"/>
+              <a:t>]</a:t>
+            </a:r>
+            <a:endParaRPr lang="zh-TW" altLang="en-US" sz="3200" dirty="0"/>
+          </a:p>
+        </p:txBody>
+      </p:sp>
+      <p:pic>
+        <p:nvPicPr>
+          <p:cNvPr id="2" name="圖片 1">
+            <a:extLst>
+              <a:ext uri="{FF2B5EF4-FFF2-40B4-BE49-F238E27FC236}">
+                <a16:creationId xmlns:a16="http://schemas.microsoft.com/office/drawing/2014/main" id="{F35EB3A5-8E03-485A-B5CD-DDA5F3706710}"/>
+              </a:ext>
+            </a:extLst>
+          </p:cNvPr>
+          <p:cNvPicPr>
+            <a:picLocks noChangeAspect="1"/>
+          </p:cNvPicPr>
+          <p:nvPr/>
+        </p:nvPicPr>
+        <p:blipFill>
+          <a:blip r:embed="rId2"/>
+          <a:stretch>
+            <a:fillRect/>
+          </a:stretch>
+        </p:blipFill>
+        <p:spPr>
+          <a:xfrm>
+            <a:off x="151570" y="1490392"/>
+            <a:ext cx="11888859" cy="3877216"/>
+          </a:xfrm>
+          <a:prstGeom prst="rect">
+            <a:avLst/>
+          </a:prstGeom>
+        </p:spPr>
+      </p:pic>
       <p:sp>
         <p:nvSpPr>
           <p:cNvPr id="6" name="矩形 5">
             <a:extLst>
               <a:ext uri="{FF2B5EF4-FFF2-40B4-BE49-F238E27FC236}">
-                <a16:creationId xmlns:a16="http://schemas.microsoft.com/office/drawing/2014/main" id="{7E457E04-C7CD-490C-B1F9-BC06F7917A00}"/>
+                <a16:creationId xmlns:a16="http://schemas.microsoft.com/office/drawing/2014/main" id="{F1DAB1B0-8FB3-46AF-B46A-D42B67C75031}"/>
               </a:ext>
             </a:extLst>
           </p:cNvPr>
@@ -4487,8 +7285,8 @@
         </p:nvSpPr>
         <p:spPr>
           <a:xfrm>
-            <a:off x="3454880" y="3183147"/>
-            <a:ext cx="2445588" cy="672861"/>
+            <a:off x="10864492" y="1638654"/>
+            <a:ext cx="1056575" cy="240946"/>
           </a:xfrm>
           <a:prstGeom prst="rect">
             <a:avLst/>
@@ -4528,7 +7326,7 @@
     </p:spTree>
     <p:extLst>
       <p:ext uri="{BB962C8B-B14F-4D97-AF65-F5344CB8AC3E}">
-        <p14:creationId xmlns:p14="http://schemas.microsoft.com/office/powerpoint/2010/main" val="848115534"/>
+        <p14:creationId xmlns:p14="http://schemas.microsoft.com/office/powerpoint/2010/main" val="3470006312"/>
       </p:ext>
     </p:extLst>
   </p:cSld>
@@ -4555,12 +7353,42 @@
           <a:chExt cx="0" cy="0"/>
         </a:xfrm>
       </p:grpSpPr>
+      <p:pic>
+        <p:nvPicPr>
+          <p:cNvPr id="7" name="圖片 6">
+            <a:extLst>
+              <a:ext uri="{FF2B5EF4-FFF2-40B4-BE49-F238E27FC236}">
+                <a16:creationId xmlns:a16="http://schemas.microsoft.com/office/drawing/2014/main" id="{16370932-BEE2-4960-967E-7CDA075A6A0A}"/>
+              </a:ext>
+            </a:extLst>
+          </p:cNvPr>
+          <p:cNvPicPr>
+            <a:picLocks noChangeAspect="1"/>
+          </p:cNvPicPr>
+          <p:nvPr/>
+        </p:nvPicPr>
+        <p:blipFill>
+          <a:blip r:embed="rId2"/>
+          <a:stretch>
+            <a:fillRect/>
+          </a:stretch>
+        </p:blipFill>
+        <p:spPr>
+          <a:xfrm>
+            <a:off x="151570" y="1490392"/>
+            <a:ext cx="11888859" cy="3877216"/>
+          </a:xfrm>
+          <a:prstGeom prst="rect">
+            <a:avLst/>
+          </a:prstGeom>
+        </p:spPr>
+      </p:pic>
       <p:sp>
         <p:nvSpPr>
           <p:cNvPr id="5" name="標題 1">
             <a:extLst>
               <a:ext uri="{FF2B5EF4-FFF2-40B4-BE49-F238E27FC236}">
-                <a16:creationId xmlns:a16="http://schemas.microsoft.com/office/drawing/2014/main" id="{661029B9-809A-457A-A97A-169A46A01553}"/>
+                <a16:creationId xmlns:a16="http://schemas.microsoft.com/office/drawing/2014/main" id="{D19A21AF-8592-42C5-9394-E5E3D2E017CB}"/>
               </a:ext>
             </a:extLst>
           </p:cNvPr>
@@ -4604,45 +7432,67 @@
           <a:p>
             <a:r>
               <a:rPr lang="zh-TW" altLang="en-US" sz="3200" dirty="0"/>
-              <a:t>一開始會給予你模板，可以按照這個模板進行填寫</a:t>
-            </a:r>
-          </a:p>
-        </p:txBody>
-      </p:sp>
-      <p:pic>
-        <p:nvPicPr>
-          <p:cNvPr id="7" name="圖片 6">
-            <a:extLst>
-              <a:ext uri="{FF2B5EF4-FFF2-40B4-BE49-F238E27FC236}">
-                <a16:creationId xmlns:a16="http://schemas.microsoft.com/office/drawing/2014/main" id="{9DD7603B-58CB-44F7-ADC6-20E518044F82}"/>
-              </a:ext>
-            </a:extLst>
-          </p:cNvPr>
-          <p:cNvPicPr>
-            <a:picLocks noChangeAspect="1"/>
-          </p:cNvPicPr>
+              <a:t>找到自己的報告，並點選自己的名字</a:t>
+            </a:r>
+          </a:p>
+        </p:txBody>
+      </p:sp>
+      <p:sp>
+        <p:nvSpPr>
+          <p:cNvPr id="6" name="矩形 5">
+            <a:extLst>
+              <a:ext uri="{FF2B5EF4-FFF2-40B4-BE49-F238E27FC236}">
+                <a16:creationId xmlns:a16="http://schemas.microsoft.com/office/drawing/2014/main" id="{7E457E04-C7CD-490C-B1F9-BC06F7917A00}"/>
+              </a:ext>
+            </a:extLst>
+          </p:cNvPr>
+          <p:cNvSpPr/>
           <p:nvPr/>
-        </p:nvPicPr>
-        <p:blipFill>
-          <a:blip r:embed="rId2"/>
-          <a:stretch>
-            <a:fillRect/>
-          </a:stretch>
-        </p:blipFill>
+        </p:nvSpPr>
         <p:spPr>
           <a:xfrm>
-            <a:off x="846666" y="1086387"/>
-            <a:ext cx="7833800" cy="5534545"/>
+            <a:off x="3251199" y="3183147"/>
+            <a:ext cx="2760133" cy="787720"/>
           </a:xfrm>
           <a:prstGeom prst="rect">
             <a:avLst/>
           </a:prstGeom>
-        </p:spPr>
-      </p:pic>
+          <a:noFill/>
+          <a:ln>
+            <a:solidFill>
+              <a:srgbClr val="FF0000"/>
+            </a:solidFill>
+          </a:ln>
+        </p:spPr>
+        <p:style>
+          <a:lnRef idx="2">
+            <a:schemeClr val="accent1">
+              <a:shade val="50000"/>
+            </a:schemeClr>
+          </a:lnRef>
+          <a:fillRef idx="1">
+            <a:schemeClr val="accent1"/>
+          </a:fillRef>
+          <a:effectRef idx="0">
+            <a:schemeClr val="accent1"/>
+          </a:effectRef>
+          <a:fontRef idx="minor">
+            <a:schemeClr val="lt1"/>
+          </a:fontRef>
+        </p:style>
+        <p:txBody>
+          <a:bodyPr rtlCol="0" anchor="ctr"/>
+          <a:lstStyle/>
+          <a:p>
+            <a:pPr algn="ctr"/>
+            <a:endParaRPr lang="zh-TW" altLang="en-US"/>
+          </a:p>
+        </p:txBody>
+      </p:sp>
     </p:spTree>
     <p:extLst>
       <p:ext uri="{BB962C8B-B14F-4D97-AF65-F5344CB8AC3E}">
-        <p14:creationId xmlns:p14="http://schemas.microsoft.com/office/powerpoint/2010/main" val="1151758177"/>
+        <p14:creationId xmlns:p14="http://schemas.microsoft.com/office/powerpoint/2010/main" val="848115534"/>
       </p:ext>
     </p:extLst>
   </p:cSld>
@@ -4718,7 +7568,7 @@
           <a:p>
             <a:r>
               <a:rPr lang="zh-TW" altLang="en-US" sz="3200" dirty="0"/>
-              <a:t>若想要新增專案區塊，可以點選 </a:t>
+              <a:t>點選 </a:t>
             </a:r>
             <a:r>
               <a:rPr lang="en-US" altLang="zh-TW" sz="3200" dirty="0"/>
@@ -5909,6 +8759,36 @@
           <a:chExt cx="0" cy="0"/>
         </a:xfrm>
       </p:grpSpPr>
+      <p:pic>
+        <p:nvPicPr>
+          <p:cNvPr id="2" name="圖片 1">
+            <a:extLst>
+              <a:ext uri="{FF2B5EF4-FFF2-40B4-BE49-F238E27FC236}">
+                <a16:creationId xmlns:a16="http://schemas.microsoft.com/office/drawing/2014/main" id="{9D3B7EAF-A718-4476-8FC9-30464F82FF95}"/>
+              </a:ext>
+            </a:extLst>
+          </p:cNvPr>
+          <p:cNvPicPr>
+            <a:picLocks noChangeAspect="1"/>
+          </p:cNvPicPr>
+          <p:nvPr/>
+        </p:nvPicPr>
+        <p:blipFill>
+          <a:blip r:embed="rId2"/>
+          <a:stretch>
+            <a:fillRect/>
+          </a:stretch>
+        </p:blipFill>
+        <p:spPr>
+          <a:xfrm>
+            <a:off x="728134" y="1137166"/>
+            <a:ext cx="10112673" cy="5336567"/>
+          </a:xfrm>
+          <a:prstGeom prst="rect">
+            <a:avLst/>
+          </a:prstGeom>
+        </p:spPr>
+      </p:pic>
       <p:sp>
         <p:nvSpPr>
           <p:cNvPr id="4" name="標題 1">
@@ -5966,7 +8846,7 @@
             </a:r>
             <a:r>
               <a:rPr lang="zh-TW" altLang="en-US" sz="3200" dirty="0"/>
-              <a:t>專案列表</a:t>
+              <a:t>整體進度上傳</a:t>
             </a:r>
             <a:r>
               <a:rPr lang="en-US" altLang="zh-TW" sz="3200" dirty="0"/>
@@ -5974,42 +8854,12 @@
             </a:r>
             <a:r>
               <a:rPr lang="zh-TW" altLang="en-US" sz="3200" dirty="0"/>
-              <a:t> 的個別專案，進行審閱</a:t>
+              <a:t> 的個別專案上，進行審閱</a:t>
             </a:r>
             <a:endParaRPr lang="en-US" altLang="zh-TW" sz="3200" dirty="0"/>
           </a:p>
         </p:txBody>
       </p:sp>
-      <p:pic>
-        <p:nvPicPr>
-          <p:cNvPr id="5" name="圖片 4">
-            <a:extLst>
-              <a:ext uri="{FF2B5EF4-FFF2-40B4-BE49-F238E27FC236}">
-                <a16:creationId xmlns:a16="http://schemas.microsoft.com/office/drawing/2014/main" id="{30CC16E4-45DF-484E-A6A1-7EE8A8EAC371}"/>
-              </a:ext>
-            </a:extLst>
-          </p:cNvPr>
-          <p:cNvPicPr>
-            <a:picLocks noChangeAspect="1"/>
-          </p:cNvPicPr>
-          <p:nvPr/>
-        </p:nvPicPr>
-        <p:blipFill>
-          <a:blip r:embed="rId2"/>
-          <a:stretch>
-            <a:fillRect/>
-          </a:stretch>
-        </p:blipFill>
-        <p:spPr>
-          <a:xfrm>
-            <a:off x="1066799" y="1078696"/>
-            <a:ext cx="9525001" cy="5063924"/>
-          </a:xfrm>
-          <a:prstGeom prst="rect">
-            <a:avLst/>
-          </a:prstGeom>
-        </p:spPr>
-      </p:pic>
       <p:sp>
         <p:nvSpPr>
           <p:cNvPr id="6" name="矩形 5">
@@ -6024,8 +8874,8 @@
         </p:nvSpPr>
         <p:spPr>
           <a:xfrm>
-            <a:off x="9296399" y="1154535"/>
-            <a:ext cx="550334" cy="242465"/>
+            <a:off x="8932332" y="1227032"/>
+            <a:ext cx="872068" cy="242465"/>
           </a:xfrm>
           <a:prstGeom prst="rect">
             <a:avLst/>
@@ -6076,7 +8926,7 @@
         </p:nvSpPr>
         <p:spPr>
           <a:xfrm>
-            <a:off x="2523067" y="1769533"/>
+            <a:off x="5655734" y="2040467"/>
             <a:ext cx="330200" cy="499534"/>
           </a:xfrm>
           <a:prstGeom prst="downArrow">
